--- a/KTX/baocao/03.pptx
+++ b/KTX/baocao/03.pptx
@@ -14,25 +14,34 @@
     <p:sldId id="262" r:id="rId12"/>
     <p:sldId id="263" r:id="rId13"/>
     <p:sldId id="264" r:id="rId14"/>
+    <p:sldId id="265" r:id="rId15"/>
   </p:sldIdLst>
   <p:sldSz cx="18288000" cy="10287000"/>
   <p:notesSz cx="6858000" cy="9144000"/>
   <p:embeddedFontLst>
     <p:embeddedFont>
       <p:font typeface="Lilita One" charset="1" panose="02000000000000000000"/>
-      <p:regular r:id="rId15"/>
+      <p:regular r:id="rId16"/>
     </p:embeddedFont>
     <p:embeddedFont>
       <p:font typeface="Varela Round" charset="1" panose="00000500000000000000"/>
-      <p:regular r:id="rId16"/>
+      <p:regular r:id="rId17"/>
     </p:embeddedFont>
     <p:embeddedFont>
       <p:font typeface="Canva Sans" charset="1" panose="020B0503030501040103"/>
-      <p:regular r:id="rId17"/>
+      <p:regular r:id="rId18"/>
+    </p:embeddedFont>
+    <p:embeddedFont>
+      <p:font typeface="Times New Roman Bold" charset="1" panose="02020803070505020304"/>
+      <p:regular r:id="rId19"/>
+    </p:embeddedFont>
+    <p:embeddedFont>
+      <p:font typeface="Times New Roman" charset="1" panose="02020603050405020304"/>
+      <p:regular r:id="rId20"/>
     </p:embeddedFont>
     <p:embeddedFont>
       <p:font typeface="Noto Sans" charset="1" panose="020B0502040504020204"/>
-      <p:regular r:id="rId18"/>
+      <p:regular r:id="rId21"/>
     </p:embeddedFont>
   </p:embeddedFontLst>
   <p:defaultTextStyle>
@@ -3867,7 +3876,2951 @@
 </p:sld>
 </file>
 
+<file path=ppt/slides/slide10.xml><?xml version="1.0" encoding="utf-8"?>
+<p:sld xmlns:p="http://schemas.openxmlformats.org/presentationml/2006/main" xmlns:a="http://schemas.openxmlformats.org/drawingml/2006/main" xmlns:r="http://schemas.openxmlformats.org/officeDocument/2006/relationships">
+  <p:cSld>
+    <p:spTree>
+      <p:nvGrpSpPr>
+        <p:cNvPr id="1" name=""/>
+        <p:cNvGrpSpPr/>
+        <p:nvPr/>
+      </p:nvGrpSpPr>
+      <p:grpSpPr>
+        <a:xfrm>
+          <a:off x="0" y="0"/>
+          <a:ext cx="0" cy="0"/>
+          <a:chOff x="0" y="0"/>
+          <a:chExt cx="0" cy="0"/>
+        </a:xfrm>
+      </p:grpSpPr>
+      <p:sp>
+        <p:nvSpPr>
+          <p:cNvPr name="Freeform 2" id="2"/>
+          <p:cNvSpPr/>
+          <p:nvPr/>
+        </p:nvSpPr>
+        <p:spPr>
+          <a:xfrm flipH="false" flipV="false" rot="-5400000">
+            <a:off x="3955719" y="-5233061"/>
+            <a:ext cx="10376561" cy="20753122"/>
+          </a:xfrm>
+          <a:custGeom>
+            <a:avLst/>
+            <a:gdLst/>
+            <a:ahLst/>
+            <a:cxnLst/>
+            <a:rect r="r" b="b" t="t" l="l"/>
+            <a:pathLst>
+              <a:path h="20753122" w="10376561">
+                <a:moveTo>
+                  <a:pt x="0" y="0"/>
+                </a:moveTo>
+                <a:lnTo>
+                  <a:pt x="10376562" y="0"/>
+                </a:lnTo>
+                <a:lnTo>
+                  <a:pt x="10376562" y="20753122"/>
+                </a:lnTo>
+                <a:lnTo>
+                  <a:pt x="0" y="20753122"/>
+                </a:lnTo>
+                <a:lnTo>
+                  <a:pt x="0" y="0"/>
+                </a:lnTo>
+                <a:close/>
+              </a:path>
+            </a:pathLst>
+          </a:custGeom>
+          <a:blipFill>
+            <a:blip r:embed="rId2">
+              <a:alphaModFix amt="5000"/>
+              <a:extLst>
+                <a:ext uri="{96DAC541-7B7A-43D3-8B79-37D633B846F1}">
+                  <asvg:svgBlip xmlns:asvg="http://schemas.microsoft.com/office/drawing/2016/SVG/main" r:embed="rId3"/>
+                </a:ext>
+              </a:extLst>
+            </a:blip>
+            <a:stretch>
+              <a:fillRect l="0" t="0" r="0" b="0"/>
+            </a:stretch>
+          </a:blipFill>
+        </p:spPr>
+      </p:sp>
+      <p:sp>
+        <p:nvSpPr>
+          <p:cNvPr name="Freeform 3" id="3"/>
+          <p:cNvSpPr/>
+          <p:nvPr/>
+        </p:nvSpPr>
+        <p:spPr>
+          <a:xfrm flipH="false" flipV="false" rot="-2182206">
+            <a:off x="-29544" y="2376101"/>
+            <a:ext cx="3646515" cy="3547065"/>
+          </a:xfrm>
+          <a:custGeom>
+            <a:avLst/>
+            <a:gdLst/>
+            <a:ahLst/>
+            <a:cxnLst/>
+            <a:rect r="r" b="b" t="t" l="l"/>
+            <a:pathLst>
+              <a:path h="3547065" w="3646515">
+                <a:moveTo>
+                  <a:pt x="0" y="0"/>
+                </a:moveTo>
+                <a:lnTo>
+                  <a:pt x="3646515" y="0"/>
+                </a:lnTo>
+                <a:lnTo>
+                  <a:pt x="3646515" y="3547065"/>
+                </a:lnTo>
+                <a:lnTo>
+                  <a:pt x="0" y="3547065"/>
+                </a:lnTo>
+                <a:lnTo>
+                  <a:pt x="0" y="0"/>
+                </a:lnTo>
+                <a:close/>
+              </a:path>
+            </a:pathLst>
+          </a:custGeom>
+          <a:blipFill>
+            <a:blip r:embed="rId4">
+              <a:extLst>
+                <a:ext uri="{96DAC541-7B7A-43D3-8B79-37D633B846F1}">
+                  <asvg:svgBlip xmlns:asvg="http://schemas.microsoft.com/office/drawing/2016/SVG/main" r:embed="rId5"/>
+                </a:ext>
+              </a:extLst>
+            </a:blip>
+            <a:stretch>
+              <a:fillRect l="0" t="0" r="0" b="0"/>
+            </a:stretch>
+          </a:blipFill>
+        </p:spPr>
+      </p:sp>
+      <p:sp>
+        <p:nvSpPr>
+          <p:cNvPr name="Freeform 4" id="4"/>
+          <p:cNvSpPr/>
+          <p:nvPr/>
+        </p:nvSpPr>
+        <p:spPr>
+          <a:xfrm flipH="false" flipV="false" rot="1999307">
+            <a:off x="13617114" y="-667259"/>
+            <a:ext cx="3723411" cy="3842169"/>
+          </a:xfrm>
+          <a:custGeom>
+            <a:avLst/>
+            <a:gdLst/>
+            <a:ahLst/>
+            <a:cxnLst/>
+            <a:rect r="r" b="b" t="t" l="l"/>
+            <a:pathLst>
+              <a:path h="3842169" w="3723411">
+                <a:moveTo>
+                  <a:pt x="0" y="0"/>
+                </a:moveTo>
+                <a:lnTo>
+                  <a:pt x="3723411" y="0"/>
+                </a:lnTo>
+                <a:lnTo>
+                  <a:pt x="3723411" y="3842169"/>
+                </a:lnTo>
+                <a:lnTo>
+                  <a:pt x="0" y="3842169"/>
+                </a:lnTo>
+                <a:lnTo>
+                  <a:pt x="0" y="0"/>
+                </a:lnTo>
+                <a:close/>
+              </a:path>
+            </a:pathLst>
+          </a:custGeom>
+          <a:blipFill>
+            <a:blip r:embed="rId6">
+              <a:extLst>
+                <a:ext uri="{96DAC541-7B7A-43D3-8B79-37D633B846F1}">
+                  <asvg:svgBlip xmlns:asvg="http://schemas.microsoft.com/office/drawing/2016/SVG/main" r:embed="rId7"/>
+                </a:ext>
+              </a:extLst>
+            </a:blip>
+            <a:stretch>
+              <a:fillRect l="0" t="0" r="0" b="0"/>
+            </a:stretch>
+          </a:blipFill>
+        </p:spPr>
+      </p:sp>
+      <p:sp>
+        <p:nvSpPr>
+          <p:cNvPr name="Freeform 5" id="5"/>
+          <p:cNvSpPr/>
+          <p:nvPr/>
+        </p:nvSpPr>
+        <p:spPr>
+          <a:xfrm flipH="false" flipV="false" rot="-1261922">
+            <a:off x="14832834" y="3616651"/>
+            <a:ext cx="3134767" cy="3676166"/>
+          </a:xfrm>
+          <a:custGeom>
+            <a:avLst/>
+            <a:gdLst/>
+            <a:ahLst/>
+            <a:cxnLst/>
+            <a:rect r="r" b="b" t="t" l="l"/>
+            <a:pathLst>
+              <a:path h="3676166" w="3134767">
+                <a:moveTo>
+                  <a:pt x="0" y="0"/>
+                </a:moveTo>
+                <a:lnTo>
+                  <a:pt x="3134767" y="0"/>
+                </a:lnTo>
+                <a:lnTo>
+                  <a:pt x="3134767" y="3676165"/>
+                </a:lnTo>
+                <a:lnTo>
+                  <a:pt x="0" y="3676165"/>
+                </a:lnTo>
+                <a:lnTo>
+                  <a:pt x="0" y="0"/>
+                </a:lnTo>
+                <a:close/>
+              </a:path>
+            </a:pathLst>
+          </a:custGeom>
+          <a:blipFill>
+            <a:blip r:embed="rId8">
+              <a:extLst>
+                <a:ext uri="{96DAC541-7B7A-43D3-8B79-37D633B846F1}">
+                  <asvg:svgBlip xmlns:asvg="http://schemas.microsoft.com/office/drawing/2016/SVG/main" r:embed="rId9"/>
+                </a:ext>
+              </a:extLst>
+            </a:blip>
+            <a:stretch>
+              <a:fillRect l="0" t="0" r="0" b="0"/>
+            </a:stretch>
+          </a:blipFill>
+        </p:spPr>
+      </p:sp>
+      <p:sp>
+        <p:nvSpPr>
+          <p:cNvPr name="Freeform 6" id="6"/>
+          <p:cNvSpPr/>
+          <p:nvPr/>
+        </p:nvSpPr>
+        <p:spPr>
+          <a:xfrm flipH="false" flipV="false" rot="695800">
+            <a:off x="1290351" y="7186679"/>
+            <a:ext cx="4770192" cy="3087615"/>
+          </a:xfrm>
+          <a:custGeom>
+            <a:avLst/>
+            <a:gdLst/>
+            <a:ahLst/>
+            <a:cxnLst/>
+            <a:rect r="r" b="b" t="t" l="l"/>
+            <a:pathLst>
+              <a:path h="3087615" w="4770192">
+                <a:moveTo>
+                  <a:pt x="0" y="0"/>
+                </a:moveTo>
+                <a:lnTo>
+                  <a:pt x="4770191" y="0"/>
+                </a:lnTo>
+                <a:lnTo>
+                  <a:pt x="4770191" y="3087615"/>
+                </a:lnTo>
+                <a:lnTo>
+                  <a:pt x="0" y="3087615"/>
+                </a:lnTo>
+                <a:lnTo>
+                  <a:pt x="0" y="0"/>
+                </a:lnTo>
+                <a:close/>
+              </a:path>
+            </a:pathLst>
+          </a:custGeom>
+          <a:blipFill>
+            <a:blip r:embed="rId10">
+              <a:extLst>
+                <a:ext uri="{96DAC541-7B7A-43D3-8B79-37D633B846F1}">
+                  <asvg:svgBlip xmlns:asvg="http://schemas.microsoft.com/office/drawing/2016/SVG/main" r:embed="rId11"/>
+                </a:ext>
+              </a:extLst>
+            </a:blip>
+            <a:stretch>
+              <a:fillRect l="0" t="0" r="0" b="0"/>
+            </a:stretch>
+          </a:blipFill>
+        </p:spPr>
+      </p:sp>
+      <p:sp>
+        <p:nvSpPr>
+          <p:cNvPr name="Freeform 7" id="7"/>
+          <p:cNvSpPr/>
+          <p:nvPr/>
+        </p:nvSpPr>
+        <p:spPr>
+          <a:xfrm flipH="false" flipV="false" rot="0">
+            <a:off x="2264510" y="293587"/>
+            <a:ext cx="2821872" cy="2693605"/>
+          </a:xfrm>
+          <a:custGeom>
+            <a:avLst/>
+            <a:gdLst/>
+            <a:ahLst/>
+            <a:cxnLst/>
+            <a:rect r="r" b="b" t="t" l="l"/>
+            <a:pathLst>
+              <a:path h="2693605" w="2821872">
+                <a:moveTo>
+                  <a:pt x="0" y="0"/>
+                </a:moveTo>
+                <a:lnTo>
+                  <a:pt x="2821872" y="0"/>
+                </a:lnTo>
+                <a:lnTo>
+                  <a:pt x="2821872" y="2693605"/>
+                </a:lnTo>
+                <a:lnTo>
+                  <a:pt x="0" y="2693605"/>
+                </a:lnTo>
+                <a:lnTo>
+                  <a:pt x="0" y="0"/>
+                </a:lnTo>
+                <a:close/>
+              </a:path>
+            </a:pathLst>
+          </a:custGeom>
+          <a:blipFill>
+            <a:blip r:embed="rId12">
+              <a:extLst>
+                <a:ext uri="{96DAC541-7B7A-43D3-8B79-37D633B846F1}">
+                  <asvg:svgBlip xmlns:asvg="http://schemas.microsoft.com/office/drawing/2016/SVG/main" r:embed="rId13"/>
+                </a:ext>
+              </a:extLst>
+            </a:blip>
+            <a:stretch>
+              <a:fillRect l="0" t="0" r="0" b="0"/>
+            </a:stretch>
+          </a:blipFill>
+        </p:spPr>
+      </p:sp>
+      <p:sp>
+        <p:nvSpPr>
+          <p:cNvPr name="Freeform 8" id="8"/>
+          <p:cNvSpPr/>
+          <p:nvPr/>
+        </p:nvSpPr>
+        <p:spPr>
+          <a:xfrm flipH="false" flipV="false" rot="-573857">
+            <a:off x="12935469" y="7783583"/>
+            <a:ext cx="3268273" cy="2638388"/>
+          </a:xfrm>
+          <a:custGeom>
+            <a:avLst/>
+            <a:gdLst/>
+            <a:ahLst/>
+            <a:cxnLst/>
+            <a:rect r="r" b="b" t="t" l="l"/>
+            <a:pathLst>
+              <a:path h="2638388" w="3268273">
+                <a:moveTo>
+                  <a:pt x="0" y="0"/>
+                </a:moveTo>
+                <a:lnTo>
+                  <a:pt x="3268273" y="0"/>
+                </a:lnTo>
+                <a:lnTo>
+                  <a:pt x="3268273" y="2638388"/>
+                </a:lnTo>
+                <a:lnTo>
+                  <a:pt x="0" y="2638388"/>
+                </a:lnTo>
+                <a:lnTo>
+                  <a:pt x="0" y="0"/>
+                </a:lnTo>
+                <a:close/>
+              </a:path>
+            </a:pathLst>
+          </a:custGeom>
+          <a:blipFill>
+            <a:blip r:embed="rId14">
+              <a:extLst>
+                <a:ext uri="{96DAC541-7B7A-43D3-8B79-37D633B846F1}">
+                  <asvg:svgBlip xmlns:asvg="http://schemas.microsoft.com/office/drawing/2016/SVG/main" r:embed="rId15"/>
+                </a:ext>
+              </a:extLst>
+            </a:blip>
+            <a:stretch>
+              <a:fillRect l="0" t="0" r="0" b="0"/>
+            </a:stretch>
+          </a:blipFill>
+        </p:spPr>
+      </p:sp>
+      <p:sp>
+        <p:nvSpPr>
+          <p:cNvPr name="TextBox 9" id="9"/>
+          <p:cNvSpPr txBox="true"/>
+          <p:nvPr/>
+        </p:nvSpPr>
+        <p:spPr>
+          <a:xfrm rot="0">
+            <a:off x="4144766" y="3671357"/>
+            <a:ext cx="10267167" cy="5232264"/>
+          </a:xfrm>
+          <a:prstGeom prst="rect">
+            <a:avLst/>
+          </a:prstGeom>
+        </p:spPr>
+        <p:txBody>
+          <a:bodyPr anchor="t" rtlCol="false" tIns="0" lIns="0" bIns="0" rIns="0">
+            <a:spAutoFit/>
+          </a:bodyPr>
+          <a:lstStyle/>
+          <a:p>
+            <a:pPr algn="ctr">
+              <a:lnSpc>
+                <a:spcPts val="13744"/>
+              </a:lnSpc>
+            </a:pPr>
+            <a:r>
+              <a:rPr lang="en-US" sz="11454">
+                <a:solidFill>
+                  <a:srgbClr val="1C3D86"/>
+                </a:solidFill>
+                <a:latin typeface="Lilita One"/>
+                <a:ea typeface="Lilita One"/>
+                <a:cs typeface="Lilita One"/>
+                <a:sym typeface="Lilita One"/>
+              </a:rPr>
+              <a:t>THANK FOR LISTENING</a:t>
+            </a:r>
+          </a:p>
+          <a:p>
+            <a:pPr algn="ctr">
+              <a:lnSpc>
+                <a:spcPts val="13744"/>
+              </a:lnSpc>
+              <a:spcBef>
+                <a:spcPct val="0"/>
+              </a:spcBef>
+            </a:pPr>
+          </a:p>
+        </p:txBody>
+      </p:sp>
+      <p:sp>
+        <p:nvSpPr>
+          <p:cNvPr name="Freeform 10" id="10"/>
+          <p:cNvSpPr/>
+          <p:nvPr/>
+        </p:nvSpPr>
+        <p:spPr>
+          <a:xfrm flipH="false" flipV="false" rot="0">
+            <a:off x="10730121" y="1253826"/>
+            <a:ext cx="1504614" cy="248945"/>
+          </a:xfrm>
+          <a:custGeom>
+            <a:avLst/>
+            <a:gdLst/>
+            <a:ahLst/>
+            <a:cxnLst/>
+            <a:rect r="r" b="b" t="t" l="l"/>
+            <a:pathLst>
+              <a:path h="248945" w="1504614">
+                <a:moveTo>
+                  <a:pt x="0" y="0"/>
+                </a:moveTo>
+                <a:lnTo>
+                  <a:pt x="1504614" y="0"/>
+                </a:lnTo>
+                <a:lnTo>
+                  <a:pt x="1504614" y="248945"/>
+                </a:lnTo>
+                <a:lnTo>
+                  <a:pt x="0" y="248945"/>
+                </a:lnTo>
+                <a:lnTo>
+                  <a:pt x="0" y="0"/>
+                </a:lnTo>
+                <a:close/>
+              </a:path>
+            </a:pathLst>
+          </a:custGeom>
+          <a:blipFill>
+            <a:blip r:embed="rId16">
+              <a:extLst>
+                <a:ext uri="{96DAC541-7B7A-43D3-8B79-37D633B846F1}">
+                  <asvg:svgBlip xmlns:asvg="http://schemas.microsoft.com/office/drawing/2016/SVG/main" r:embed="rId17"/>
+                </a:ext>
+              </a:extLst>
+            </a:blip>
+            <a:stretch>
+              <a:fillRect l="0" t="0" r="0" b="0"/>
+            </a:stretch>
+          </a:blipFill>
+        </p:spPr>
+      </p:sp>
+      <p:sp>
+        <p:nvSpPr>
+          <p:cNvPr name="Freeform 11" id="11"/>
+          <p:cNvSpPr/>
+          <p:nvPr/>
+        </p:nvSpPr>
+        <p:spPr>
+          <a:xfrm flipH="false" flipV="false" rot="0">
+            <a:off x="6798748" y="8903621"/>
+            <a:ext cx="1504614" cy="248945"/>
+          </a:xfrm>
+          <a:custGeom>
+            <a:avLst/>
+            <a:gdLst/>
+            <a:ahLst/>
+            <a:cxnLst/>
+            <a:rect r="r" b="b" t="t" l="l"/>
+            <a:pathLst>
+              <a:path h="248945" w="1504614">
+                <a:moveTo>
+                  <a:pt x="0" y="0"/>
+                </a:moveTo>
+                <a:lnTo>
+                  <a:pt x="1504615" y="0"/>
+                </a:lnTo>
+                <a:lnTo>
+                  <a:pt x="1504615" y="248945"/>
+                </a:lnTo>
+                <a:lnTo>
+                  <a:pt x="0" y="248945"/>
+                </a:lnTo>
+                <a:lnTo>
+                  <a:pt x="0" y="0"/>
+                </a:lnTo>
+                <a:close/>
+              </a:path>
+            </a:pathLst>
+          </a:custGeom>
+          <a:blipFill>
+            <a:blip r:embed="rId16">
+              <a:extLst>
+                <a:ext uri="{96DAC541-7B7A-43D3-8B79-37D633B846F1}">
+                  <asvg:svgBlip xmlns:asvg="http://schemas.microsoft.com/office/drawing/2016/SVG/main" r:embed="rId17"/>
+                </a:ext>
+              </a:extLst>
+            </a:blip>
+            <a:stretch>
+              <a:fillRect l="0" t="0" r="0" b="0"/>
+            </a:stretch>
+          </a:blipFill>
+        </p:spPr>
+      </p:sp>
+      <p:sp>
+        <p:nvSpPr>
+          <p:cNvPr name="Freeform 12" id="12"/>
+          <p:cNvSpPr/>
+          <p:nvPr/>
+        </p:nvSpPr>
+        <p:spPr>
+          <a:xfrm flipH="false" flipV="false" rot="0">
+            <a:off x="6167549" y="1108561"/>
+            <a:ext cx="631200" cy="611690"/>
+          </a:xfrm>
+          <a:custGeom>
+            <a:avLst/>
+            <a:gdLst/>
+            <a:ahLst/>
+            <a:cxnLst/>
+            <a:rect r="r" b="b" t="t" l="l"/>
+            <a:pathLst>
+              <a:path h="611690" w="631200">
+                <a:moveTo>
+                  <a:pt x="0" y="0"/>
+                </a:moveTo>
+                <a:lnTo>
+                  <a:pt x="631199" y="0"/>
+                </a:lnTo>
+                <a:lnTo>
+                  <a:pt x="631199" y="611689"/>
+                </a:lnTo>
+                <a:lnTo>
+                  <a:pt x="0" y="611689"/>
+                </a:lnTo>
+                <a:lnTo>
+                  <a:pt x="0" y="0"/>
+                </a:lnTo>
+                <a:close/>
+              </a:path>
+            </a:pathLst>
+          </a:custGeom>
+          <a:blipFill>
+            <a:blip r:embed="rId18">
+              <a:extLst>
+                <a:ext uri="{96DAC541-7B7A-43D3-8B79-37D633B846F1}">
+                  <asvg:svgBlip xmlns:asvg="http://schemas.microsoft.com/office/drawing/2016/SVG/main" r:embed="rId19"/>
+                </a:ext>
+              </a:extLst>
+            </a:blip>
+            <a:stretch>
+              <a:fillRect l="0" t="0" r="0" b="0"/>
+            </a:stretch>
+          </a:blipFill>
+        </p:spPr>
+      </p:sp>
+      <p:sp>
+        <p:nvSpPr>
+          <p:cNvPr name="Freeform 13" id="13"/>
+          <p:cNvSpPr/>
+          <p:nvPr/>
+        </p:nvSpPr>
+        <p:spPr>
+          <a:xfrm flipH="false" flipV="false" rot="0">
+            <a:off x="10967099" y="8581312"/>
+            <a:ext cx="631200" cy="611690"/>
+          </a:xfrm>
+          <a:custGeom>
+            <a:avLst/>
+            <a:gdLst/>
+            <a:ahLst/>
+            <a:cxnLst/>
+            <a:rect r="r" b="b" t="t" l="l"/>
+            <a:pathLst>
+              <a:path h="611690" w="631200">
+                <a:moveTo>
+                  <a:pt x="0" y="0"/>
+                </a:moveTo>
+                <a:lnTo>
+                  <a:pt x="631200" y="0"/>
+                </a:lnTo>
+                <a:lnTo>
+                  <a:pt x="631200" y="611690"/>
+                </a:lnTo>
+                <a:lnTo>
+                  <a:pt x="0" y="611690"/>
+                </a:lnTo>
+                <a:lnTo>
+                  <a:pt x="0" y="0"/>
+                </a:lnTo>
+                <a:close/>
+              </a:path>
+            </a:pathLst>
+          </a:custGeom>
+          <a:blipFill>
+            <a:blip r:embed="rId18">
+              <a:extLst>
+                <a:ext uri="{96DAC541-7B7A-43D3-8B79-37D633B846F1}">
+                  <asvg:svgBlip xmlns:asvg="http://schemas.microsoft.com/office/drawing/2016/SVG/main" r:embed="rId19"/>
+                </a:ext>
+              </a:extLst>
+            </a:blip>
+            <a:stretch>
+              <a:fillRect l="0" t="0" r="0" b="0"/>
+            </a:stretch>
+          </a:blipFill>
+        </p:spPr>
+      </p:sp>
+    </p:spTree>
+  </p:cSld>
+  <p:clrMapOvr>
+    <a:masterClrMapping/>
+  </p:clrMapOvr>
+</p:sld>
+</file>
+
 <file path=ppt/slides/slide2.xml><?xml version="1.0" encoding="utf-8"?>
+<p:sld xmlns:p="http://schemas.openxmlformats.org/presentationml/2006/main" xmlns:a="http://schemas.openxmlformats.org/drawingml/2006/main" xmlns:r="http://schemas.openxmlformats.org/officeDocument/2006/relationships">
+  <p:cSld>
+    <p:spTree>
+      <p:nvGrpSpPr>
+        <p:cNvPr id="1" name=""/>
+        <p:cNvGrpSpPr/>
+        <p:nvPr/>
+      </p:nvGrpSpPr>
+      <p:grpSpPr>
+        <a:xfrm>
+          <a:off x="0" y="0"/>
+          <a:ext cx="0" cy="0"/>
+          <a:chOff x="0" y="0"/>
+          <a:chExt cx="0" cy="0"/>
+        </a:xfrm>
+      </p:grpSpPr>
+      <p:sp>
+        <p:nvSpPr>
+          <p:cNvPr name="Freeform 2" id="2"/>
+          <p:cNvSpPr/>
+          <p:nvPr/>
+        </p:nvSpPr>
+        <p:spPr>
+          <a:xfrm flipH="false" flipV="false" rot="-5400000">
+            <a:off x="3955719" y="-5233061"/>
+            <a:ext cx="10376561" cy="20753122"/>
+          </a:xfrm>
+          <a:custGeom>
+            <a:avLst/>
+            <a:gdLst/>
+            <a:ahLst/>
+            <a:cxnLst/>
+            <a:rect r="r" b="b" t="t" l="l"/>
+            <a:pathLst>
+              <a:path h="20753122" w="10376561">
+                <a:moveTo>
+                  <a:pt x="0" y="0"/>
+                </a:moveTo>
+                <a:lnTo>
+                  <a:pt x="10376562" y="0"/>
+                </a:lnTo>
+                <a:lnTo>
+                  <a:pt x="10376562" y="20753122"/>
+                </a:lnTo>
+                <a:lnTo>
+                  <a:pt x="0" y="20753122"/>
+                </a:lnTo>
+                <a:lnTo>
+                  <a:pt x="0" y="0"/>
+                </a:lnTo>
+                <a:close/>
+              </a:path>
+            </a:pathLst>
+          </a:custGeom>
+          <a:blipFill>
+            <a:blip r:embed="rId2">
+              <a:alphaModFix amt="5000"/>
+              <a:extLst>
+                <a:ext uri="{96DAC541-7B7A-43D3-8B79-37D633B846F1}">
+                  <asvg:svgBlip xmlns:asvg="http://schemas.microsoft.com/office/drawing/2016/SVG/main" r:embed="rId3"/>
+                </a:ext>
+              </a:extLst>
+            </a:blip>
+            <a:stretch>
+              <a:fillRect l="0" t="0" r="0" b="0"/>
+            </a:stretch>
+          </a:blipFill>
+        </p:spPr>
+      </p:sp>
+      <p:grpSp>
+        <p:nvGrpSpPr>
+          <p:cNvPr name="Group 3" id="3"/>
+          <p:cNvGrpSpPr/>
+          <p:nvPr/>
+        </p:nvGrpSpPr>
+        <p:grpSpPr>
+          <a:xfrm rot="0">
+            <a:off x="2262814" y="1344224"/>
+            <a:ext cx="13736990" cy="7914076"/>
+            <a:chOff x="0" y="0"/>
+            <a:chExt cx="3617973" cy="2084366"/>
+          </a:xfrm>
+        </p:grpSpPr>
+        <p:sp>
+          <p:nvSpPr>
+            <p:cNvPr name="Freeform 4" id="4"/>
+            <p:cNvSpPr/>
+            <p:nvPr/>
+          </p:nvSpPr>
+          <p:spPr>
+            <a:xfrm flipH="false" flipV="false" rot="0">
+              <a:off x="0" y="0"/>
+              <a:ext cx="3617973" cy="2084366"/>
+            </a:xfrm>
+            <a:custGeom>
+              <a:avLst/>
+              <a:gdLst/>
+              <a:ahLst/>
+              <a:cxnLst/>
+              <a:rect r="r" b="b" t="t" l="l"/>
+              <a:pathLst>
+                <a:path h="2084366" w="3617973">
+                  <a:moveTo>
+                    <a:pt x="12399" y="0"/>
+                  </a:moveTo>
+                  <a:lnTo>
+                    <a:pt x="3605574" y="0"/>
+                  </a:lnTo>
+                  <a:cubicBezTo>
+                    <a:pt x="3612421" y="0"/>
+                    <a:pt x="3617973" y="5551"/>
+                    <a:pt x="3617973" y="12399"/>
+                  </a:cubicBezTo>
+                  <a:lnTo>
+                    <a:pt x="3617973" y="2071967"/>
+                  </a:lnTo>
+                  <a:cubicBezTo>
+                    <a:pt x="3617973" y="2078814"/>
+                    <a:pt x="3612421" y="2084366"/>
+                    <a:pt x="3605574" y="2084366"/>
+                  </a:cubicBezTo>
+                  <a:lnTo>
+                    <a:pt x="12399" y="2084366"/>
+                  </a:lnTo>
+                  <a:cubicBezTo>
+                    <a:pt x="5551" y="2084366"/>
+                    <a:pt x="0" y="2078814"/>
+                    <a:pt x="0" y="2071967"/>
+                  </a:cubicBezTo>
+                  <a:lnTo>
+                    <a:pt x="0" y="12399"/>
+                  </a:lnTo>
+                  <a:cubicBezTo>
+                    <a:pt x="0" y="5551"/>
+                    <a:pt x="5551" y="0"/>
+                    <a:pt x="12399" y="0"/>
+                  </a:cubicBezTo>
+                  <a:close/>
+                </a:path>
+              </a:pathLst>
+            </a:custGeom>
+            <a:solidFill>
+              <a:srgbClr val="FFFFFF"/>
+            </a:solidFill>
+            <a:ln w="66675" cap="rnd">
+              <a:solidFill>
+                <a:srgbClr val="1C3D86"/>
+              </a:solidFill>
+              <a:prstDash val="solid"/>
+              <a:round/>
+            </a:ln>
+          </p:spPr>
+        </p:sp>
+        <p:sp>
+          <p:nvSpPr>
+            <p:cNvPr name="TextBox 5" id="5"/>
+            <p:cNvSpPr txBox="true"/>
+            <p:nvPr/>
+          </p:nvSpPr>
+          <p:spPr>
+            <a:xfrm>
+              <a:off x="0" y="-38100"/>
+              <a:ext cx="3617973" cy="2122466"/>
+            </a:xfrm>
+            <a:prstGeom prst="rect">
+              <a:avLst/>
+            </a:prstGeom>
+          </p:spPr>
+          <p:txBody>
+            <a:bodyPr anchor="ctr" rtlCol="false" tIns="50800" lIns="50800" bIns="50800" rIns="50800"/>
+            <a:lstStyle/>
+            <a:p>
+              <a:pPr algn="ctr">
+                <a:lnSpc>
+                  <a:spcPts val="2659"/>
+                </a:lnSpc>
+              </a:pPr>
+            </a:p>
+            <a:p>
+              <a:pPr algn="ctr">
+                <a:lnSpc>
+                  <a:spcPts val="2659"/>
+                </a:lnSpc>
+              </a:pPr>
+              <a:r>
+                <a:rPr lang="en-US" sz="1899">
+                  <a:solidFill>
+                    <a:srgbClr val="FFFFFF"/>
+                  </a:solidFill>
+                  <a:latin typeface="Canva Sans"/>
+                  <a:ea typeface="Canva Sans"/>
+                  <a:cs typeface="Canva Sans"/>
+                  <a:sym typeface="Canva Sans"/>
+                </a:rPr>
+                <a:t>TP (True Positive) – Đúng kiểu Dương tính</a:t>
+              </a:r>
+            </a:p>
+            <a:p>
+              <a:pPr algn="ctr" marL="410209" indent="-205105" lvl="1">
+                <a:lnSpc>
+                  <a:spcPts val="2659"/>
+                </a:lnSpc>
+                <a:buFont typeface="Arial"/>
+                <a:buChar char="•"/>
+              </a:pPr>
+              <a:r>
+                <a:rPr lang="en-US" sz="1899">
+                  <a:solidFill>
+                    <a:srgbClr val="FFFFFF"/>
+                  </a:solidFill>
+                  <a:latin typeface="Canva Sans"/>
+                  <a:ea typeface="Canva Sans"/>
+                  <a:cs typeface="Canva Sans"/>
+                  <a:sym typeface="Canva Sans"/>
+                </a:rPr>
+                <a:t>Cách dịch: AI đoán là Positive (Có bệnh), và thực tế chứng minh AI đã đoán True (Đúng).</a:t>
+              </a:r>
+            </a:p>
+            <a:p>
+              <a:pPr algn="ctr">
+                <a:lnSpc>
+                  <a:spcPts val="2659"/>
+                </a:lnSpc>
+              </a:pPr>
+            </a:p>
+          </p:txBody>
+        </p:sp>
+      </p:grpSp>
+      <p:sp>
+        <p:nvSpPr>
+          <p:cNvPr name="Freeform 6" id="6"/>
+          <p:cNvSpPr/>
+          <p:nvPr/>
+        </p:nvSpPr>
+        <p:spPr>
+          <a:xfrm flipH="false" flipV="false" rot="1365716">
+            <a:off x="-1327372" y="873614"/>
+            <a:ext cx="3119438" cy="3102422"/>
+          </a:xfrm>
+          <a:custGeom>
+            <a:avLst/>
+            <a:gdLst/>
+            <a:ahLst/>
+            <a:cxnLst/>
+            <a:rect r="r" b="b" t="t" l="l"/>
+            <a:pathLst>
+              <a:path h="3102422" w="3119438">
+                <a:moveTo>
+                  <a:pt x="0" y="0"/>
+                </a:moveTo>
+                <a:lnTo>
+                  <a:pt x="3119438" y="0"/>
+                </a:lnTo>
+                <a:lnTo>
+                  <a:pt x="3119438" y="3102422"/>
+                </a:lnTo>
+                <a:lnTo>
+                  <a:pt x="0" y="3102422"/>
+                </a:lnTo>
+                <a:lnTo>
+                  <a:pt x="0" y="0"/>
+                </a:lnTo>
+                <a:close/>
+              </a:path>
+            </a:pathLst>
+          </a:custGeom>
+          <a:blipFill>
+            <a:blip r:embed="rId4">
+              <a:extLst>
+                <a:ext uri="{96DAC541-7B7A-43D3-8B79-37D633B846F1}">
+                  <asvg:svgBlip xmlns:asvg="http://schemas.microsoft.com/office/drawing/2016/SVG/main" r:embed="rId5"/>
+                </a:ext>
+              </a:extLst>
+            </a:blip>
+            <a:stretch>
+              <a:fillRect l="0" t="0" r="0" b="0"/>
+            </a:stretch>
+          </a:blipFill>
+        </p:spPr>
+      </p:sp>
+      <p:sp>
+        <p:nvSpPr>
+          <p:cNvPr name="Freeform 7" id="7"/>
+          <p:cNvSpPr/>
+          <p:nvPr/>
+        </p:nvSpPr>
+        <p:spPr>
+          <a:xfrm flipH="false" flipV="false" rot="-1409927">
+            <a:off x="15498369" y="5282412"/>
+            <a:ext cx="3017828" cy="3039937"/>
+          </a:xfrm>
+          <a:custGeom>
+            <a:avLst/>
+            <a:gdLst/>
+            <a:ahLst/>
+            <a:cxnLst/>
+            <a:rect r="r" b="b" t="t" l="l"/>
+            <a:pathLst>
+              <a:path h="3039937" w="3017828">
+                <a:moveTo>
+                  <a:pt x="0" y="0"/>
+                </a:moveTo>
+                <a:lnTo>
+                  <a:pt x="3017829" y="0"/>
+                </a:lnTo>
+                <a:lnTo>
+                  <a:pt x="3017829" y="3039937"/>
+                </a:lnTo>
+                <a:lnTo>
+                  <a:pt x="0" y="3039937"/>
+                </a:lnTo>
+                <a:lnTo>
+                  <a:pt x="0" y="0"/>
+                </a:lnTo>
+                <a:close/>
+              </a:path>
+            </a:pathLst>
+          </a:custGeom>
+          <a:blipFill>
+            <a:blip r:embed="rId6">
+              <a:extLst>
+                <a:ext uri="{96DAC541-7B7A-43D3-8B79-37D633B846F1}">
+                  <asvg:svgBlip xmlns:asvg="http://schemas.microsoft.com/office/drawing/2016/SVG/main" r:embed="rId7"/>
+                </a:ext>
+              </a:extLst>
+            </a:blip>
+            <a:stretch>
+              <a:fillRect l="0" t="0" r="0" b="0"/>
+            </a:stretch>
+          </a:blipFill>
+        </p:spPr>
+      </p:sp>
+      <p:sp>
+        <p:nvSpPr>
+          <p:cNvPr name="Freeform 8" id="8"/>
+          <p:cNvSpPr/>
+          <p:nvPr/>
+        </p:nvSpPr>
+        <p:spPr>
+          <a:xfrm flipH="false" flipV="false" rot="0">
+            <a:off x="16378924" y="1720250"/>
+            <a:ext cx="1504614" cy="248945"/>
+          </a:xfrm>
+          <a:custGeom>
+            <a:avLst/>
+            <a:gdLst/>
+            <a:ahLst/>
+            <a:cxnLst/>
+            <a:rect r="r" b="b" t="t" l="l"/>
+            <a:pathLst>
+              <a:path h="248945" w="1504614">
+                <a:moveTo>
+                  <a:pt x="0" y="0"/>
+                </a:moveTo>
+                <a:lnTo>
+                  <a:pt x="1504614" y="0"/>
+                </a:lnTo>
+                <a:lnTo>
+                  <a:pt x="1504614" y="248946"/>
+                </a:lnTo>
+                <a:lnTo>
+                  <a:pt x="0" y="248946"/>
+                </a:lnTo>
+                <a:lnTo>
+                  <a:pt x="0" y="0"/>
+                </a:lnTo>
+                <a:close/>
+              </a:path>
+            </a:pathLst>
+          </a:custGeom>
+          <a:blipFill>
+            <a:blip r:embed="rId8">
+              <a:extLst>
+                <a:ext uri="{96DAC541-7B7A-43D3-8B79-37D633B846F1}">
+                  <asvg:svgBlip xmlns:asvg="http://schemas.microsoft.com/office/drawing/2016/SVG/main" r:embed="rId9"/>
+                </a:ext>
+              </a:extLst>
+            </a:blip>
+            <a:stretch>
+              <a:fillRect l="0" t="0" r="0" b="0"/>
+            </a:stretch>
+          </a:blipFill>
+        </p:spPr>
+      </p:sp>
+      <p:sp>
+        <p:nvSpPr>
+          <p:cNvPr name="Freeform 9" id="9"/>
+          <p:cNvSpPr/>
+          <p:nvPr/>
+        </p:nvSpPr>
+        <p:spPr>
+          <a:xfrm flipH="false" flipV="false" rot="0">
+            <a:off x="451550" y="9009355"/>
+            <a:ext cx="1504614" cy="248945"/>
+          </a:xfrm>
+          <a:custGeom>
+            <a:avLst/>
+            <a:gdLst/>
+            <a:ahLst/>
+            <a:cxnLst/>
+            <a:rect r="r" b="b" t="t" l="l"/>
+            <a:pathLst>
+              <a:path h="248945" w="1504614">
+                <a:moveTo>
+                  <a:pt x="0" y="0"/>
+                </a:moveTo>
+                <a:lnTo>
+                  <a:pt x="1504614" y="0"/>
+                </a:lnTo>
+                <a:lnTo>
+                  <a:pt x="1504614" y="248945"/>
+                </a:lnTo>
+                <a:lnTo>
+                  <a:pt x="0" y="248945"/>
+                </a:lnTo>
+                <a:lnTo>
+                  <a:pt x="0" y="0"/>
+                </a:lnTo>
+                <a:close/>
+              </a:path>
+            </a:pathLst>
+          </a:custGeom>
+          <a:blipFill>
+            <a:blip r:embed="rId8">
+              <a:extLst>
+                <a:ext uri="{96DAC541-7B7A-43D3-8B79-37D633B846F1}">
+                  <asvg:svgBlip xmlns:asvg="http://schemas.microsoft.com/office/drawing/2016/SVG/main" r:embed="rId9"/>
+                </a:ext>
+              </a:extLst>
+            </a:blip>
+            <a:stretch>
+              <a:fillRect l="0" t="0" r="0" b="0"/>
+            </a:stretch>
+          </a:blipFill>
+        </p:spPr>
+      </p:sp>
+      <p:graphicFrame>
+        <p:nvGraphicFramePr>
+          <p:cNvPr name="Table 10" id="10"/>
+          <p:cNvGraphicFramePr>
+            <a:graphicFrameLocks noGrp="true"/>
+          </p:cNvGraphicFramePr>
+          <p:nvPr/>
+        </p:nvGraphicFramePr>
+        <p:xfrm>
+          <a:off x="2270764" y="1344224"/>
+          <a:ext cx="13746472" cy="7914076"/>
+        </p:xfrm>
+        <a:graphic>
+          <a:graphicData uri="http://schemas.openxmlformats.org/drawingml/2006/table">
+            <a:tbl>
+              <a:tblPr/>
+              <a:tblGrid>
+                <a:gridCol w="3816609"/>
+                <a:gridCol w="3051873"/>
+                <a:gridCol w="3705790"/>
+                <a:gridCol w="3172200"/>
+              </a:tblGrid>
+              <a:tr h="1024105">
+                <a:tc>
+                  <a:txBody>
+                    <a:bodyPr anchor="t" rtlCol="false"/>
+                    <a:lstStyle/>
+                    <a:p>
+                      <a:pPr algn="ctr">
+                        <a:lnSpc>
+                          <a:spcPts val="2659"/>
+                        </a:lnSpc>
+                        <a:defRPr/>
+                      </a:pPr>
+                      <a:r>
+                        <a:rPr lang="en-US" sz="1899" b="true">
+                          <a:solidFill>
+                            <a:srgbClr val="000000"/>
+                          </a:solidFill>
+                          <a:latin typeface="Times New Roman Bold"/>
+                          <a:ea typeface="Times New Roman Bold"/>
+                          <a:cs typeface="Times New Roman Bold"/>
+                          <a:sym typeface="Times New Roman Bold"/>
+                        </a:rPr>
+                        <a:t>Lớp</a:t>
+                      </a:r>
+                      <a:endParaRPr lang="en-US" sz="1100"/>
+                    </a:p>
+                  </a:txBody>
+                  <a:tcPr marL="190500" marR="190500" marT="190500" marB="190500" anchor="ctr">
+                    <a:lnL cmpd="sng" algn="ctr" cap="flat" w="38100">
+                      <a:solidFill>
+                        <a:srgbClr val="000000"/>
+                      </a:solidFill>
+                      <a:prstDash val="solid"/>
+                      <a:round/>
+                      <a:headEnd type="none" w="med" len="med"/>
+                      <a:tailEnd type="none" w="med" len="med"/>
+                    </a:lnL>
+                    <a:lnR cmpd="sng" algn="ctr" cap="flat" w="38100">
+                      <a:solidFill>
+                        <a:srgbClr val="000000"/>
+                      </a:solidFill>
+                      <a:prstDash val="solid"/>
+                      <a:round/>
+                      <a:headEnd type="none" w="med" len="med"/>
+                      <a:tailEnd type="none" w="med" len="med"/>
+                    </a:lnR>
+                    <a:lnT cmpd="sng" algn="ctr" cap="flat" w="38100">
+                      <a:solidFill>
+                        <a:srgbClr val="000000"/>
+                      </a:solidFill>
+                      <a:prstDash val="solid"/>
+                      <a:round/>
+                      <a:headEnd type="none" w="med" len="med"/>
+                      <a:tailEnd type="none" w="med" len="med"/>
+                    </a:lnT>
+                    <a:lnB cmpd="sng" algn="ctr" cap="flat" w="38100">
+                      <a:solidFill>
+                        <a:srgbClr val="000000"/>
+                      </a:solidFill>
+                      <a:prstDash val="solid"/>
+                      <a:round/>
+                      <a:headEnd type="none" w="med" len="med"/>
+                      <a:tailEnd type="none" w="med" len="med"/>
+                    </a:lnB>
+                  </a:tcPr>
+                </a:tc>
+                <a:tc>
+                  <a:txBody>
+                    <a:bodyPr anchor="t" rtlCol="false"/>
+                    <a:lstStyle/>
+                    <a:p>
+                      <a:pPr algn="ctr">
+                        <a:lnSpc>
+                          <a:spcPts val="2659"/>
+                        </a:lnSpc>
+                        <a:defRPr/>
+                      </a:pPr>
+                      <a:r>
+                        <a:rPr lang="en-US" sz="1899" b="true">
+                          <a:solidFill>
+                            <a:srgbClr val="000000"/>
+                          </a:solidFill>
+                          <a:latin typeface="Times New Roman Bold"/>
+                          <a:ea typeface="Times New Roman Bold"/>
+                          <a:cs typeface="Times New Roman Bold"/>
+                          <a:sym typeface="Times New Roman Bold"/>
+                        </a:rPr>
+                        <a:t>Họ và tên </a:t>
+                      </a:r>
+                      <a:endParaRPr lang="en-US" sz="1100"/>
+                    </a:p>
+                  </a:txBody>
+                  <a:tcPr marL="190500" marR="190500" marT="190500" marB="190500" anchor="ctr">
+                    <a:lnL cmpd="sng" algn="ctr" cap="flat" w="38100">
+                      <a:solidFill>
+                        <a:srgbClr val="000000"/>
+                      </a:solidFill>
+                      <a:prstDash val="solid"/>
+                      <a:round/>
+                      <a:headEnd type="none" w="med" len="med"/>
+                      <a:tailEnd type="none" w="med" len="med"/>
+                    </a:lnL>
+                    <a:lnR cmpd="sng" algn="ctr" cap="flat" w="38100">
+                      <a:solidFill>
+                        <a:srgbClr val="000000"/>
+                      </a:solidFill>
+                      <a:prstDash val="solid"/>
+                      <a:round/>
+                      <a:headEnd type="none" w="med" len="med"/>
+                      <a:tailEnd type="none" w="med" len="med"/>
+                    </a:lnR>
+                    <a:lnT cmpd="sng" algn="ctr" cap="flat" w="38100">
+                      <a:solidFill>
+                        <a:srgbClr val="000000"/>
+                      </a:solidFill>
+                      <a:prstDash val="solid"/>
+                      <a:round/>
+                      <a:headEnd type="none" w="med" len="med"/>
+                      <a:tailEnd type="none" w="med" len="med"/>
+                    </a:lnT>
+                    <a:lnB cmpd="sng" algn="ctr" cap="flat" w="38100">
+                      <a:solidFill>
+                        <a:srgbClr val="000000"/>
+                      </a:solidFill>
+                      <a:prstDash val="solid"/>
+                      <a:round/>
+                      <a:headEnd type="none" w="med" len="med"/>
+                      <a:tailEnd type="none" w="med" len="med"/>
+                    </a:lnB>
+                  </a:tcPr>
+                </a:tc>
+                <a:tc>
+                  <a:txBody>
+                    <a:bodyPr anchor="t" rtlCol="false"/>
+                    <a:lstStyle/>
+                    <a:p>
+                      <a:pPr algn="ctr">
+                        <a:lnSpc>
+                          <a:spcPts val="2659"/>
+                        </a:lnSpc>
+                        <a:defRPr/>
+                      </a:pPr>
+                      <a:r>
+                        <a:rPr lang="en-US" sz="1899" b="true">
+                          <a:solidFill>
+                            <a:srgbClr val="000000"/>
+                          </a:solidFill>
+                          <a:latin typeface="Times New Roman Bold"/>
+                          <a:ea typeface="Times New Roman Bold"/>
+                          <a:cs typeface="Times New Roman Bold"/>
+                          <a:sym typeface="Times New Roman Bold"/>
+                        </a:rPr>
+                        <a:t>MSSV</a:t>
+                      </a:r>
+                      <a:endParaRPr lang="en-US" sz="1100"/>
+                    </a:p>
+                  </a:txBody>
+                  <a:tcPr marL="190500" marR="190500" marT="190500" marB="190500" anchor="ctr">
+                    <a:lnL cmpd="sng" algn="ctr" cap="flat" w="38100">
+                      <a:solidFill>
+                        <a:srgbClr val="000000"/>
+                      </a:solidFill>
+                      <a:prstDash val="solid"/>
+                      <a:round/>
+                      <a:headEnd type="none" w="med" len="med"/>
+                      <a:tailEnd type="none" w="med" len="med"/>
+                    </a:lnL>
+                    <a:lnR cmpd="sng" algn="ctr" cap="flat" w="38100">
+                      <a:solidFill>
+                        <a:srgbClr val="000000"/>
+                      </a:solidFill>
+                      <a:prstDash val="solid"/>
+                      <a:round/>
+                      <a:headEnd type="none" w="med" len="med"/>
+                      <a:tailEnd type="none" w="med" len="med"/>
+                    </a:lnR>
+                    <a:lnT cmpd="sng" algn="ctr" cap="flat" w="38100">
+                      <a:solidFill>
+                        <a:srgbClr val="000000"/>
+                      </a:solidFill>
+                      <a:prstDash val="solid"/>
+                      <a:round/>
+                      <a:headEnd type="none" w="med" len="med"/>
+                      <a:tailEnd type="none" w="med" len="med"/>
+                    </a:lnT>
+                    <a:lnB cmpd="sng" algn="ctr" cap="flat" w="38100">
+                      <a:solidFill>
+                        <a:srgbClr val="000000"/>
+                      </a:solidFill>
+                      <a:prstDash val="solid"/>
+                      <a:round/>
+                      <a:headEnd type="none" w="med" len="med"/>
+                      <a:tailEnd type="none" w="med" len="med"/>
+                    </a:lnB>
+                  </a:tcPr>
+                </a:tc>
+                <a:tc>
+                  <a:txBody>
+                    <a:bodyPr anchor="t" rtlCol="false"/>
+                    <a:lstStyle/>
+                    <a:p>
+                      <a:pPr algn="ctr">
+                        <a:lnSpc>
+                          <a:spcPts val="2659"/>
+                        </a:lnSpc>
+                        <a:defRPr/>
+                      </a:pPr>
+                      <a:r>
+                        <a:rPr lang="en-US" sz="1899" b="true">
+                          <a:solidFill>
+                            <a:srgbClr val="000000"/>
+                          </a:solidFill>
+                          <a:latin typeface="Times New Roman Bold"/>
+                          <a:ea typeface="Times New Roman Bold"/>
+                          <a:cs typeface="Times New Roman Bold"/>
+                          <a:sym typeface="Times New Roman Bold"/>
+                        </a:rPr>
+                        <a:t>Ghi chú</a:t>
+                      </a:r>
+                      <a:endParaRPr lang="en-US" sz="1100"/>
+                    </a:p>
+                  </a:txBody>
+                  <a:tcPr marL="190500" marR="190500" marT="190500" marB="190500" anchor="ctr">
+                    <a:lnL cmpd="sng" algn="ctr" cap="flat" w="38100">
+                      <a:solidFill>
+                        <a:srgbClr val="000000"/>
+                      </a:solidFill>
+                      <a:prstDash val="solid"/>
+                      <a:round/>
+                      <a:headEnd type="none" w="med" len="med"/>
+                      <a:tailEnd type="none" w="med" len="med"/>
+                    </a:lnL>
+                    <a:lnR cmpd="sng" algn="ctr" cap="flat" w="38100">
+                      <a:solidFill>
+                        <a:srgbClr val="000000"/>
+                      </a:solidFill>
+                      <a:prstDash val="solid"/>
+                      <a:round/>
+                      <a:headEnd type="none" w="med" len="med"/>
+                      <a:tailEnd type="none" w="med" len="med"/>
+                    </a:lnR>
+                    <a:lnT cmpd="sng" algn="ctr" cap="flat" w="38100">
+                      <a:solidFill>
+                        <a:srgbClr val="000000"/>
+                      </a:solidFill>
+                      <a:prstDash val="solid"/>
+                      <a:round/>
+                      <a:headEnd type="none" w="med" len="med"/>
+                      <a:tailEnd type="none" w="med" len="med"/>
+                    </a:lnT>
+                    <a:lnB cmpd="sng" algn="ctr" cap="flat" w="38100">
+                      <a:solidFill>
+                        <a:srgbClr val="000000"/>
+                      </a:solidFill>
+                      <a:prstDash val="solid"/>
+                      <a:round/>
+                      <a:headEnd type="none" w="med" len="med"/>
+                      <a:tailEnd type="none" w="med" len="med"/>
+                    </a:lnB>
+                  </a:tcPr>
+                </a:tc>
+              </a:tr>
+              <a:tr h="994187">
+                <a:tc>
+                  <a:txBody>
+                    <a:bodyPr anchor="t" rtlCol="false"/>
+                    <a:lstStyle/>
+                    <a:p>
+                      <a:pPr algn="ctr">
+                        <a:lnSpc>
+                          <a:spcPts val="2659"/>
+                        </a:lnSpc>
+                        <a:defRPr/>
+                      </a:pPr>
+                      <a:r>
+                        <a:rPr lang="en-US" sz="1899">
+                          <a:solidFill>
+                            <a:srgbClr val="000000"/>
+                          </a:solidFill>
+                          <a:latin typeface="Times New Roman"/>
+                          <a:ea typeface="Times New Roman"/>
+                          <a:cs typeface="Times New Roman"/>
+                          <a:sym typeface="Times New Roman"/>
+                        </a:rPr>
+                        <a:t>23ĐHTT04</a:t>
+                      </a:r>
+                      <a:endParaRPr lang="en-US" sz="1100"/>
+                    </a:p>
+                  </a:txBody>
+                  <a:tcPr marL="190500" marR="190500" marT="190500" marB="190500" anchor="ctr">
+                    <a:lnL cmpd="sng" algn="ctr" cap="flat" w="38100">
+                      <a:solidFill>
+                        <a:srgbClr val="000000"/>
+                      </a:solidFill>
+                      <a:prstDash val="solid"/>
+                      <a:round/>
+                      <a:headEnd type="none" w="med" len="med"/>
+                      <a:tailEnd type="none" w="med" len="med"/>
+                    </a:lnL>
+                    <a:lnR cmpd="sng" algn="ctr" cap="flat" w="38100">
+                      <a:solidFill>
+                        <a:srgbClr val="000000"/>
+                      </a:solidFill>
+                      <a:prstDash val="solid"/>
+                      <a:round/>
+                      <a:headEnd type="none" w="med" len="med"/>
+                      <a:tailEnd type="none" w="med" len="med"/>
+                    </a:lnR>
+                    <a:lnT cmpd="sng" algn="ctr" cap="flat" w="38100">
+                      <a:solidFill>
+                        <a:srgbClr val="000000"/>
+                      </a:solidFill>
+                      <a:prstDash val="solid"/>
+                      <a:round/>
+                      <a:headEnd type="none" w="med" len="med"/>
+                      <a:tailEnd type="none" w="med" len="med"/>
+                    </a:lnT>
+                    <a:lnB cmpd="sng" algn="ctr" cap="flat" w="38100">
+                      <a:solidFill>
+                        <a:srgbClr val="000000"/>
+                      </a:solidFill>
+                      <a:prstDash val="solid"/>
+                      <a:round/>
+                      <a:headEnd type="none" w="med" len="med"/>
+                      <a:tailEnd type="none" w="med" len="med"/>
+                    </a:lnB>
+                  </a:tcPr>
+                </a:tc>
+                <a:tc>
+                  <a:txBody>
+                    <a:bodyPr anchor="t" rtlCol="false"/>
+                    <a:lstStyle/>
+                    <a:p>
+                      <a:pPr algn="ctr">
+                        <a:lnSpc>
+                          <a:spcPts val="2659"/>
+                        </a:lnSpc>
+                        <a:defRPr/>
+                      </a:pPr>
+                      <a:r>
+                        <a:rPr lang="en-US" sz="1899">
+                          <a:solidFill>
+                            <a:srgbClr val="000000"/>
+                          </a:solidFill>
+                          <a:latin typeface="Times New Roman"/>
+                          <a:ea typeface="Times New Roman"/>
+                          <a:cs typeface="Times New Roman"/>
+                          <a:sym typeface="Times New Roman"/>
+                        </a:rPr>
+                        <a:t>Nguyễn Văn Thành Đạt</a:t>
+                      </a:r>
+                      <a:endParaRPr lang="en-US" sz="1100"/>
+                    </a:p>
+                  </a:txBody>
+                  <a:tcPr marL="190500" marR="190500" marT="190500" marB="190500" anchor="ctr">
+                    <a:lnL cmpd="sng" algn="ctr" cap="flat" w="38100">
+                      <a:solidFill>
+                        <a:srgbClr val="000000"/>
+                      </a:solidFill>
+                      <a:prstDash val="solid"/>
+                      <a:round/>
+                      <a:headEnd type="none" w="med" len="med"/>
+                      <a:tailEnd type="none" w="med" len="med"/>
+                    </a:lnL>
+                    <a:lnR cmpd="sng" algn="ctr" cap="flat" w="38100">
+                      <a:solidFill>
+                        <a:srgbClr val="000000"/>
+                      </a:solidFill>
+                      <a:prstDash val="solid"/>
+                      <a:round/>
+                      <a:headEnd type="none" w="med" len="med"/>
+                      <a:tailEnd type="none" w="med" len="med"/>
+                    </a:lnR>
+                    <a:lnT cmpd="sng" algn="ctr" cap="flat" w="38100">
+                      <a:solidFill>
+                        <a:srgbClr val="000000"/>
+                      </a:solidFill>
+                      <a:prstDash val="solid"/>
+                      <a:round/>
+                      <a:headEnd type="none" w="med" len="med"/>
+                      <a:tailEnd type="none" w="med" len="med"/>
+                    </a:lnT>
+                    <a:lnB cmpd="sng" algn="ctr" cap="flat" w="38100">
+                      <a:solidFill>
+                        <a:srgbClr val="000000"/>
+                      </a:solidFill>
+                      <a:prstDash val="solid"/>
+                      <a:round/>
+                      <a:headEnd type="none" w="med" len="med"/>
+                      <a:tailEnd type="none" w="med" len="med"/>
+                    </a:lnB>
+                  </a:tcPr>
+                </a:tc>
+                <a:tc>
+                  <a:txBody>
+                    <a:bodyPr anchor="t" rtlCol="false"/>
+                    <a:lstStyle/>
+                    <a:p>
+                      <a:pPr algn="ctr">
+                        <a:lnSpc>
+                          <a:spcPts val="2659"/>
+                        </a:lnSpc>
+                        <a:defRPr/>
+                      </a:pPr>
+                      <a:r>
+                        <a:rPr lang="en-US" sz="1899">
+                          <a:solidFill>
+                            <a:srgbClr val="000000"/>
+                          </a:solidFill>
+                          <a:latin typeface="Times New Roman"/>
+                          <a:ea typeface="Times New Roman"/>
+                          <a:cs typeface="Times New Roman"/>
+                          <a:sym typeface="Times New Roman"/>
+                        </a:rPr>
+                        <a:t>2331540181</a:t>
+                      </a:r>
+                      <a:endParaRPr lang="en-US" sz="1100"/>
+                    </a:p>
+                  </a:txBody>
+                  <a:tcPr marL="190500" marR="190500" marT="190500" marB="190500" anchor="ctr">
+                    <a:lnL cmpd="sng" algn="ctr" cap="flat" w="38100">
+                      <a:solidFill>
+                        <a:srgbClr val="000000"/>
+                      </a:solidFill>
+                      <a:prstDash val="solid"/>
+                      <a:round/>
+                      <a:headEnd type="none" w="med" len="med"/>
+                      <a:tailEnd type="none" w="med" len="med"/>
+                    </a:lnL>
+                    <a:lnR cmpd="sng" algn="ctr" cap="flat" w="38100">
+                      <a:solidFill>
+                        <a:srgbClr val="000000"/>
+                      </a:solidFill>
+                      <a:prstDash val="solid"/>
+                      <a:round/>
+                      <a:headEnd type="none" w="med" len="med"/>
+                      <a:tailEnd type="none" w="med" len="med"/>
+                    </a:lnR>
+                    <a:lnT cmpd="sng" algn="ctr" cap="flat" w="38100">
+                      <a:solidFill>
+                        <a:srgbClr val="000000"/>
+                      </a:solidFill>
+                      <a:prstDash val="solid"/>
+                      <a:round/>
+                      <a:headEnd type="none" w="med" len="med"/>
+                      <a:tailEnd type="none" w="med" len="med"/>
+                    </a:lnT>
+                    <a:lnB cmpd="sng" algn="ctr" cap="flat" w="38100">
+                      <a:solidFill>
+                        <a:srgbClr val="000000"/>
+                      </a:solidFill>
+                      <a:prstDash val="solid"/>
+                      <a:round/>
+                      <a:headEnd type="none" w="med" len="med"/>
+                      <a:tailEnd type="none" w="med" len="med"/>
+                    </a:lnB>
+                  </a:tcPr>
+                </a:tc>
+                <a:tc>
+                  <a:txBody>
+                    <a:bodyPr anchor="t" rtlCol="false"/>
+                    <a:lstStyle/>
+                    <a:p>
+                      <a:pPr algn="ctr">
+                        <a:lnSpc>
+                          <a:spcPts val="2659"/>
+                        </a:lnSpc>
+                        <a:defRPr/>
+                      </a:pPr>
+                      <a:endParaRPr lang="en-US" sz="1100"/>
+                    </a:p>
+                  </a:txBody>
+                  <a:tcPr marL="190500" marR="190500" marT="190500" marB="190500" anchor="ctr">
+                    <a:lnL cmpd="sng" algn="ctr" cap="flat" w="38100">
+                      <a:solidFill>
+                        <a:srgbClr val="000000"/>
+                      </a:solidFill>
+                      <a:prstDash val="solid"/>
+                      <a:round/>
+                      <a:headEnd type="none" w="med" len="med"/>
+                      <a:tailEnd type="none" w="med" len="med"/>
+                    </a:lnL>
+                    <a:lnR cmpd="sng" algn="ctr" cap="flat" w="38100">
+                      <a:solidFill>
+                        <a:srgbClr val="000000"/>
+                      </a:solidFill>
+                      <a:prstDash val="solid"/>
+                      <a:round/>
+                      <a:headEnd type="none" w="med" len="med"/>
+                      <a:tailEnd type="none" w="med" len="med"/>
+                    </a:lnR>
+                    <a:lnT cmpd="sng" algn="ctr" cap="flat" w="38100">
+                      <a:solidFill>
+                        <a:srgbClr val="000000"/>
+                      </a:solidFill>
+                      <a:prstDash val="solid"/>
+                      <a:round/>
+                      <a:headEnd type="none" w="med" len="med"/>
+                      <a:tailEnd type="none" w="med" len="med"/>
+                    </a:lnT>
+                    <a:lnB cmpd="sng" algn="ctr" cap="flat" w="38100">
+                      <a:solidFill>
+                        <a:srgbClr val="000000"/>
+                      </a:solidFill>
+                      <a:prstDash val="solid"/>
+                      <a:round/>
+                      <a:headEnd type="none" w="med" len="med"/>
+                      <a:tailEnd type="none" w="med" len="med"/>
+                    </a:lnB>
+                  </a:tcPr>
+                </a:tc>
+              </a:tr>
+              <a:tr h="1473946">
+                <a:tc>
+                  <a:txBody>
+                    <a:bodyPr anchor="t" rtlCol="false"/>
+                    <a:lstStyle/>
+                    <a:p>
+                      <a:pPr algn="ctr">
+                        <a:lnSpc>
+                          <a:spcPts val="2659"/>
+                        </a:lnSpc>
+                        <a:defRPr/>
+                      </a:pPr>
+                      <a:endParaRPr lang="en-US" sz="1100"/>
+                    </a:p>
+                    <a:p>
+                      <a:pPr algn="ctr">
+                        <a:lnSpc>
+                          <a:spcPts val="2659"/>
+                        </a:lnSpc>
+                      </a:pPr>
+                      <a:r>
+                        <a:rPr lang="en-US" sz="1899">
+                          <a:solidFill>
+                            <a:srgbClr val="000000"/>
+                          </a:solidFill>
+                          <a:latin typeface="Times New Roman"/>
+                          <a:ea typeface="Times New Roman"/>
+                          <a:cs typeface="Times New Roman"/>
+                          <a:sym typeface="Times New Roman"/>
+                        </a:rPr>
+                        <a:t>  23ĐHTT03</a:t>
+                      </a:r>
+                    </a:p>
+                    <a:p>
+                      <a:pPr algn="ctr">
+                        <a:lnSpc>
+                          <a:spcPts val="2659"/>
+                        </a:lnSpc>
+                      </a:pPr>
+                      <a:r>
+                        <a:rPr lang="en-US" sz="1899">
+                          <a:solidFill>
+                            <a:srgbClr val="000000"/>
+                          </a:solidFill>
+                          <a:latin typeface="Times New Roman"/>
+                          <a:ea typeface="Times New Roman"/>
+                          <a:cs typeface="Times New Roman"/>
+                          <a:sym typeface="Times New Roman"/>
+                        </a:rPr>
+                        <a:t>  </a:t>
+                      </a:r>
+                    </a:p>
+                  </a:txBody>
+                  <a:tcPr marL="190500" marR="190500" marT="190500" marB="190500" anchor="ctr">
+                    <a:lnL cmpd="sng" algn="ctr" cap="flat" w="38100">
+                      <a:solidFill>
+                        <a:srgbClr val="000000"/>
+                      </a:solidFill>
+                      <a:prstDash val="solid"/>
+                      <a:round/>
+                      <a:headEnd type="none" w="med" len="med"/>
+                      <a:tailEnd type="none" w="med" len="med"/>
+                    </a:lnL>
+                    <a:lnR cmpd="sng" algn="ctr" cap="flat" w="38100">
+                      <a:solidFill>
+                        <a:srgbClr val="000000"/>
+                      </a:solidFill>
+                      <a:prstDash val="solid"/>
+                      <a:round/>
+                      <a:headEnd type="none" w="med" len="med"/>
+                      <a:tailEnd type="none" w="med" len="med"/>
+                    </a:lnR>
+                    <a:lnT cmpd="sng" algn="ctr" cap="flat" w="38100">
+                      <a:solidFill>
+                        <a:srgbClr val="000000"/>
+                      </a:solidFill>
+                      <a:prstDash val="solid"/>
+                      <a:round/>
+                      <a:headEnd type="none" w="med" len="med"/>
+                      <a:tailEnd type="none" w="med" len="med"/>
+                    </a:lnT>
+                    <a:lnB cmpd="sng" algn="ctr" cap="flat" w="38100">
+                      <a:solidFill>
+                        <a:srgbClr val="000000"/>
+                      </a:solidFill>
+                      <a:prstDash val="solid"/>
+                      <a:round/>
+                      <a:headEnd type="none" w="med" len="med"/>
+                      <a:tailEnd type="none" w="med" len="med"/>
+                    </a:lnB>
+                  </a:tcPr>
+                </a:tc>
+                <a:tc>
+                  <a:txBody>
+                    <a:bodyPr anchor="t" rtlCol="false"/>
+                    <a:lstStyle/>
+                    <a:p>
+                      <a:pPr algn="ctr">
+                        <a:lnSpc>
+                          <a:spcPts val="2659"/>
+                        </a:lnSpc>
+                        <a:defRPr/>
+                      </a:pPr>
+                      <a:endParaRPr lang="en-US" sz="1100"/>
+                    </a:p>
+                    <a:p>
+                      <a:pPr algn="ctr">
+                        <a:lnSpc>
+                          <a:spcPts val="2659"/>
+                        </a:lnSpc>
+                      </a:pPr>
+                      <a:r>
+                        <a:rPr lang="en-US" sz="1899">
+                          <a:solidFill>
+                            <a:srgbClr val="000000"/>
+                          </a:solidFill>
+                          <a:latin typeface="Times New Roman"/>
+                          <a:ea typeface="Times New Roman"/>
+                          <a:cs typeface="Times New Roman"/>
+                          <a:sym typeface="Times New Roman"/>
+                        </a:rPr>
+                        <a:t>  Trần Phạm Minh Đức</a:t>
+                      </a:r>
+                    </a:p>
+                    <a:p>
+                      <a:pPr algn="ctr">
+                        <a:lnSpc>
+                          <a:spcPts val="2659"/>
+                        </a:lnSpc>
+                      </a:pPr>
+                      <a:r>
+                        <a:rPr lang="en-US" sz="1899">
+                          <a:solidFill>
+                            <a:srgbClr val="000000"/>
+                          </a:solidFill>
+                          <a:latin typeface="Times New Roman"/>
+                          <a:ea typeface="Times New Roman"/>
+                          <a:cs typeface="Times New Roman"/>
+                          <a:sym typeface="Times New Roman"/>
+                        </a:rPr>
+                        <a:t>  </a:t>
+                      </a:r>
+                    </a:p>
+                  </a:txBody>
+                  <a:tcPr marL="190500" marR="190500" marT="190500" marB="190500" anchor="ctr">
+                    <a:lnL cmpd="sng" algn="ctr" cap="flat" w="38100">
+                      <a:solidFill>
+                        <a:srgbClr val="000000"/>
+                      </a:solidFill>
+                      <a:prstDash val="solid"/>
+                      <a:round/>
+                      <a:headEnd type="none" w="med" len="med"/>
+                      <a:tailEnd type="none" w="med" len="med"/>
+                    </a:lnL>
+                    <a:lnR cmpd="sng" algn="ctr" cap="flat" w="38100">
+                      <a:solidFill>
+                        <a:srgbClr val="000000"/>
+                      </a:solidFill>
+                      <a:prstDash val="solid"/>
+                      <a:round/>
+                      <a:headEnd type="none" w="med" len="med"/>
+                      <a:tailEnd type="none" w="med" len="med"/>
+                    </a:lnR>
+                    <a:lnT cmpd="sng" algn="ctr" cap="flat" w="38100">
+                      <a:solidFill>
+                        <a:srgbClr val="000000"/>
+                      </a:solidFill>
+                      <a:prstDash val="solid"/>
+                      <a:round/>
+                      <a:headEnd type="none" w="med" len="med"/>
+                      <a:tailEnd type="none" w="med" len="med"/>
+                    </a:lnT>
+                    <a:lnB cmpd="sng" algn="ctr" cap="flat" w="38100">
+                      <a:solidFill>
+                        <a:srgbClr val="000000"/>
+                      </a:solidFill>
+                      <a:prstDash val="solid"/>
+                      <a:round/>
+                      <a:headEnd type="none" w="med" len="med"/>
+                      <a:tailEnd type="none" w="med" len="med"/>
+                    </a:lnB>
+                  </a:tcPr>
+                </a:tc>
+                <a:tc>
+                  <a:txBody>
+                    <a:bodyPr anchor="t" rtlCol="false"/>
+                    <a:lstStyle/>
+                    <a:p>
+                      <a:pPr algn="ctr">
+                        <a:lnSpc>
+                          <a:spcPts val="2659"/>
+                        </a:lnSpc>
+                        <a:defRPr/>
+                      </a:pPr>
+                      <a:endParaRPr lang="en-US" sz="1100"/>
+                    </a:p>
+                    <a:p>
+                      <a:pPr algn="ctr">
+                        <a:lnSpc>
+                          <a:spcPts val="2659"/>
+                        </a:lnSpc>
+                      </a:pPr>
+                      <a:r>
+                        <a:rPr lang="en-US" sz="1899">
+                          <a:solidFill>
+                            <a:srgbClr val="000000"/>
+                          </a:solidFill>
+                          <a:latin typeface="Times New Roman"/>
+                          <a:ea typeface="Times New Roman"/>
+                          <a:cs typeface="Times New Roman"/>
+                          <a:sym typeface="Times New Roman"/>
+                        </a:rPr>
+                        <a:t>  2331540141</a:t>
+                      </a:r>
+                    </a:p>
+                    <a:p>
+                      <a:pPr algn="ctr">
+                        <a:lnSpc>
+                          <a:spcPts val="2659"/>
+                        </a:lnSpc>
+                      </a:pPr>
+                      <a:r>
+                        <a:rPr lang="en-US" sz="1899">
+                          <a:solidFill>
+                            <a:srgbClr val="000000"/>
+                          </a:solidFill>
+                          <a:latin typeface="Times New Roman"/>
+                          <a:ea typeface="Times New Roman"/>
+                          <a:cs typeface="Times New Roman"/>
+                          <a:sym typeface="Times New Roman"/>
+                        </a:rPr>
+                        <a:t>  </a:t>
+                      </a:r>
+                    </a:p>
+                  </a:txBody>
+                  <a:tcPr marL="190500" marR="190500" marT="190500" marB="190500" anchor="ctr">
+                    <a:lnL cmpd="sng" algn="ctr" cap="flat" w="38100">
+                      <a:solidFill>
+                        <a:srgbClr val="000000"/>
+                      </a:solidFill>
+                      <a:prstDash val="solid"/>
+                      <a:round/>
+                      <a:headEnd type="none" w="med" len="med"/>
+                      <a:tailEnd type="none" w="med" len="med"/>
+                    </a:lnL>
+                    <a:lnR cmpd="sng" algn="ctr" cap="flat" w="38100">
+                      <a:solidFill>
+                        <a:srgbClr val="000000"/>
+                      </a:solidFill>
+                      <a:prstDash val="solid"/>
+                      <a:round/>
+                      <a:headEnd type="none" w="med" len="med"/>
+                      <a:tailEnd type="none" w="med" len="med"/>
+                    </a:lnR>
+                    <a:lnT cmpd="sng" algn="ctr" cap="flat" w="38100">
+                      <a:solidFill>
+                        <a:srgbClr val="000000"/>
+                      </a:solidFill>
+                      <a:prstDash val="solid"/>
+                      <a:round/>
+                      <a:headEnd type="none" w="med" len="med"/>
+                      <a:tailEnd type="none" w="med" len="med"/>
+                    </a:lnT>
+                    <a:lnB cmpd="sng" algn="ctr" cap="flat" w="38100">
+                      <a:solidFill>
+                        <a:srgbClr val="000000"/>
+                      </a:solidFill>
+                      <a:prstDash val="solid"/>
+                      <a:round/>
+                      <a:headEnd type="none" w="med" len="med"/>
+                      <a:tailEnd type="none" w="med" len="med"/>
+                    </a:lnB>
+                  </a:tcPr>
+                </a:tc>
+                <a:tc>
+                  <a:txBody>
+                    <a:bodyPr anchor="t" rtlCol="false"/>
+                    <a:lstStyle/>
+                    <a:p>
+                      <a:pPr algn="ctr">
+                        <a:lnSpc>
+                          <a:spcPts val="2659"/>
+                        </a:lnSpc>
+                        <a:defRPr/>
+                      </a:pPr>
+                      <a:endParaRPr lang="en-US" sz="1100"/>
+                    </a:p>
+                  </a:txBody>
+                  <a:tcPr marL="190500" marR="190500" marT="190500" marB="190500" anchor="ctr">
+                    <a:lnL cmpd="sng" algn="ctr" cap="flat" w="38100">
+                      <a:solidFill>
+                        <a:srgbClr val="000000"/>
+                      </a:solidFill>
+                      <a:prstDash val="solid"/>
+                      <a:round/>
+                      <a:headEnd type="none" w="med" len="med"/>
+                      <a:tailEnd type="none" w="med" len="med"/>
+                    </a:lnL>
+                    <a:lnR cmpd="sng" algn="ctr" cap="flat" w="38100">
+                      <a:solidFill>
+                        <a:srgbClr val="000000"/>
+                      </a:solidFill>
+                      <a:prstDash val="solid"/>
+                      <a:round/>
+                      <a:headEnd type="none" w="med" len="med"/>
+                      <a:tailEnd type="none" w="med" len="med"/>
+                    </a:lnR>
+                    <a:lnT cmpd="sng" algn="ctr" cap="flat" w="38100">
+                      <a:solidFill>
+                        <a:srgbClr val="000000"/>
+                      </a:solidFill>
+                      <a:prstDash val="solid"/>
+                      <a:round/>
+                      <a:headEnd type="none" w="med" len="med"/>
+                      <a:tailEnd type="none" w="med" len="med"/>
+                    </a:lnT>
+                    <a:lnB cmpd="sng" algn="ctr" cap="flat" w="38100">
+                      <a:solidFill>
+                        <a:srgbClr val="000000"/>
+                      </a:solidFill>
+                      <a:prstDash val="solid"/>
+                      <a:round/>
+                      <a:headEnd type="none" w="med" len="med"/>
+                      <a:tailEnd type="none" w="med" len="med"/>
+                    </a:lnB>
+                  </a:tcPr>
+                </a:tc>
+              </a:tr>
+              <a:tr h="1473946">
+                <a:tc>
+                  <a:txBody>
+                    <a:bodyPr anchor="t" rtlCol="false"/>
+                    <a:lstStyle/>
+                    <a:p>
+                      <a:pPr algn="ctr">
+                        <a:lnSpc>
+                          <a:spcPts val="2659"/>
+                        </a:lnSpc>
+                        <a:defRPr/>
+                      </a:pPr>
+                      <a:endParaRPr lang="en-US" sz="1100"/>
+                    </a:p>
+                    <a:p>
+                      <a:pPr algn="ctr">
+                        <a:lnSpc>
+                          <a:spcPts val="2659"/>
+                        </a:lnSpc>
+                      </a:pPr>
+                      <a:r>
+                        <a:rPr lang="en-US" sz="1899">
+                          <a:solidFill>
+                            <a:srgbClr val="000000"/>
+                          </a:solidFill>
+                          <a:latin typeface="Times New Roman"/>
+                          <a:ea typeface="Times New Roman"/>
+                          <a:cs typeface="Times New Roman"/>
+                          <a:sym typeface="Times New Roman"/>
+                        </a:rPr>
+                        <a:t>  24ĐHTT04</a:t>
+                      </a:r>
+                    </a:p>
+                    <a:p>
+                      <a:pPr algn="ctr">
+                        <a:lnSpc>
+                          <a:spcPts val="2659"/>
+                        </a:lnSpc>
+                      </a:pPr>
+                      <a:r>
+                        <a:rPr lang="en-US" sz="1899">
+                          <a:solidFill>
+                            <a:srgbClr val="000000"/>
+                          </a:solidFill>
+                          <a:latin typeface="Times New Roman"/>
+                          <a:ea typeface="Times New Roman"/>
+                          <a:cs typeface="Times New Roman"/>
+                          <a:sym typeface="Times New Roman"/>
+                        </a:rPr>
+                        <a:t>  </a:t>
+                      </a:r>
+                    </a:p>
+                  </a:txBody>
+                  <a:tcPr marL="190500" marR="190500" marT="190500" marB="190500" anchor="ctr">
+                    <a:lnL cmpd="sng" algn="ctr" cap="flat" w="38100">
+                      <a:solidFill>
+                        <a:srgbClr val="000000"/>
+                      </a:solidFill>
+                      <a:prstDash val="solid"/>
+                      <a:round/>
+                      <a:headEnd type="none" w="med" len="med"/>
+                      <a:tailEnd type="none" w="med" len="med"/>
+                    </a:lnL>
+                    <a:lnR cmpd="sng" algn="ctr" cap="flat" w="38100">
+                      <a:solidFill>
+                        <a:srgbClr val="000000"/>
+                      </a:solidFill>
+                      <a:prstDash val="solid"/>
+                      <a:round/>
+                      <a:headEnd type="none" w="med" len="med"/>
+                      <a:tailEnd type="none" w="med" len="med"/>
+                    </a:lnR>
+                    <a:lnT cmpd="sng" algn="ctr" cap="flat" w="38100">
+                      <a:solidFill>
+                        <a:srgbClr val="000000"/>
+                      </a:solidFill>
+                      <a:prstDash val="solid"/>
+                      <a:round/>
+                      <a:headEnd type="none" w="med" len="med"/>
+                      <a:tailEnd type="none" w="med" len="med"/>
+                    </a:lnT>
+                    <a:lnB cmpd="sng" algn="ctr" cap="flat" w="38100">
+                      <a:solidFill>
+                        <a:srgbClr val="000000"/>
+                      </a:solidFill>
+                      <a:prstDash val="solid"/>
+                      <a:round/>
+                      <a:headEnd type="none" w="med" len="med"/>
+                      <a:tailEnd type="none" w="med" len="med"/>
+                    </a:lnB>
+                  </a:tcPr>
+                </a:tc>
+                <a:tc>
+                  <a:txBody>
+                    <a:bodyPr anchor="t" rtlCol="false"/>
+                    <a:lstStyle/>
+                    <a:p>
+                      <a:pPr algn="ctr">
+                        <a:lnSpc>
+                          <a:spcPts val="2659"/>
+                        </a:lnSpc>
+                        <a:defRPr/>
+                      </a:pPr>
+                      <a:endParaRPr lang="en-US" sz="1100"/>
+                    </a:p>
+                    <a:p>
+                      <a:pPr algn="ctr">
+                        <a:lnSpc>
+                          <a:spcPts val="2659"/>
+                        </a:lnSpc>
+                      </a:pPr>
+                      <a:r>
+                        <a:rPr lang="en-US" sz="1899">
+                          <a:solidFill>
+                            <a:srgbClr val="000000"/>
+                          </a:solidFill>
+                          <a:latin typeface="Times New Roman"/>
+                          <a:ea typeface="Times New Roman"/>
+                          <a:cs typeface="Times New Roman"/>
+                          <a:sym typeface="Times New Roman"/>
+                        </a:rPr>
+                        <a:t>  Dương Trần Bảo Linh</a:t>
+                      </a:r>
+                    </a:p>
+                    <a:p>
+                      <a:pPr algn="ctr">
+                        <a:lnSpc>
+                          <a:spcPts val="2659"/>
+                        </a:lnSpc>
+                      </a:pPr>
+                      <a:r>
+                        <a:rPr lang="en-US" sz="1899">
+                          <a:solidFill>
+                            <a:srgbClr val="000000"/>
+                          </a:solidFill>
+                          <a:latin typeface="Times New Roman"/>
+                          <a:ea typeface="Times New Roman"/>
+                          <a:cs typeface="Times New Roman"/>
+                          <a:sym typeface="Times New Roman"/>
+                        </a:rPr>
+                        <a:t>  </a:t>
+                      </a:r>
+                    </a:p>
+                  </a:txBody>
+                  <a:tcPr marL="190500" marR="190500" marT="190500" marB="190500" anchor="ctr">
+                    <a:lnL cmpd="sng" algn="ctr" cap="flat" w="38100">
+                      <a:solidFill>
+                        <a:srgbClr val="000000"/>
+                      </a:solidFill>
+                      <a:prstDash val="solid"/>
+                      <a:round/>
+                      <a:headEnd type="none" w="med" len="med"/>
+                      <a:tailEnd type="none" w="med" len="med"/>
+                    </a:lnL>
+                    <a:lnR cmpd="sng" algn="ctr" cap="flat" w="38100">
+                      <a:solidFill>
+                        <a:srgbClr val="000000"/>
+                      </a:solidFill>
+                      <a:prstDash val="solid"/>
+                      <a:round/>
+                      <a:headEnd type="none" w="med" len="med"/>
+                      <a:tailEnd type="none" w="med" len="med"/>
+                    </a:lnR>
+                    <a:lnT cmpd="sng" algn="ctr" cap="flat" w="38100">
+                      <a:solidFill>
+                        <a:srgbClr val="000000"/>
+                      </a:solidFill>
+                      <a:prstDash val="solid"/>
+                      <a:round/>
+                      <a:headEnd type="none" w="med" len="med"/>
+                      <a:tailEnd type="none" w="med" len="med"/>
+                    </a:lnT>
+                    <a:lnB cmpd="sng" algn="ctr" cap="flat" w="38100">
+                      <a:solidFill>
+                        <a:srgbClr val="000000"/>
+                      </a:solidFill>
+                      <a:prstDash val="solid"/>
+                      <a:round/>
+                      <a:headEnd type="none" w="med" len="med"/>
+                      <a:tailEnd type="none" w="med" len="med"/>
+                    </a:lnB>
+                  </a:tcPr>
+                </a:tc>
+                <a:tc>
+                  <a:txBody>
+                    <a:bodyPr anchor="t" rtlCol="false"/>
+                    <a:lstStyle/>
+                    <a:p>
+                      <a:pPr algn="ctr">
+                        <a:lnSpc>
+                          <a:spcPts val="2659"/>
+                        </a:lnSpc>
+                        <a:defRPr/>
+                      </a:pPr>
+                      <a:endParaRPr lang="en-US" sz="1100"/>
+                    </a:p>
+                    <a:p>
+                      <a:pPr algn="ctr">
+                        <a:lnSpc>
+                          <a:spcPts val="2659"/>
+                        </a:lnSpc>
+                      </a:pPr>
+                      <a:r>
+                        <a:rPr lang="en-US" sz="1899">
+                          <a:solidFill>
+                            <a:srgbClr val="000000"/>
+                          </a:solidFill>
+                          <a:latin typeface="Times New Roman"/>
+                          <a:ea typeface="Times New Roman"/>
+                          <a:cs typeface="Times New Roman"/>
+                          <a:sym typeface="Times New Roman"/>
+                        </a:rPr>
+                        <a:t>  2431540211</a:t>
+                      </a:r>
+                    </a:p>
+                    <a:p>
+                      <a:pPr algn="ctr">
+                        <a:lnSpc>
+                          <a:spcPts val="2659"/>
+                        </a:lnSpc>
+                      </a:pPr>
+                      <a:r>
+                        <a:rPr lang="en-US" sz="1899">
+                          <a:solidFill>
+                            <a:srgbClr val="000000"/>
+                          </a:solidFill>
+                          <a:latin typeface="Times New Roman"/>
+                          <a:ea typeface="Times New Roman"/>
+                          <a:cs typeface="Times New Roman"/>
+                          <a:sym typeface="Times New Roman"/>
+                        </a:rPr>
+                        <a:t>  </a:t>
+                      </a:r>
+                    </a:p>
+                  </a:txBody>
+                  <a:tcPr marL="190500" marR="190500" marT="190500" marB="190500" anchor="ctr">
+                    <a:lnL cmpd="sng" algn="ctr" cap="flat" w="38100">
+                      <a:solidFill>
+                        <a:srgbClr val="000000"/>
+                      </a:solidFill>
+                      <a:prstDash val="solid"/>
+                      <a:round/>
+                      <a:headEnd type="none" w="med" len="med"/>
+                      <a:tailEnd type="none" w="med" len="med"/>
+                    </a:lnL>
+                    <a:lnR cmpd="sng" algn="ctr" cap="flat" w="38100">
+                      <a:solidFill>
+                        <a:srgbClr val="000000"/>
+                      </a:solidFill>
+                      <a:prstDash val="solid"/>
+                      <a:round/>
+                      <a:headEnd type="none" w="med" len="med"/>
+                      <a:tailEnd type="none" w="med" len="med"/>
+                    </a:lnR>
+                    <a:lnT cmpd="sng" algn="ctr" cap="flat" w="38100">
+                      <a:solidFill>
+                        <a:srgbClr val="000000"/>
+                      </a:solidFill>
+                      <a:prstDash val="solid"/>
+                      <a:round/>
+                      <a:headEnd type="none" w="med" len="med"/>
+                      <a:tailEnd type="none" w="med" len="med"/>
+                    </a:lnT>
+                    <a:lnB cmpd="sng" algn="ctr" cap="flat" w="38100">
+                      <a:solidFill>
+                        <a:srgbClr val="000000"/>
+                      </a:solidFill>
+                      <a:prstDash val="solid"/>
+                      <a:round/>
+                      <a:headEnd type="none" w="med" len="med"/>
+                      <a:tailEnd type="none" w="med" len="med"/>
+                    </a:lnB>
+                  </a:tcPr>
+                </a:tc>
+                <a:tc>
+                  <a:txBody>
+                    <a:bodyPr anchor="t" rtlCol="false"/>
+                    <a:lstStyle/>
+                    <a:p>
+                      <a:pPr algn="ctr">
+                        <a:lnSpc>
+                          <a:spcPts val="2659"/>
+                        </a:lnSpc>
+                        <a:defRPr/>
+                      </a:pPr>
+                      <a:endParaRPr lang="en-US" sz="1100"/>
+                    </a:p>
+                  </a:txBody>
+                  <a:tcPr marL="190500" marR="190500" marT="190500" marB="190500" anchor="ctr">
+                    <a:lnL cmpd="sng" algn="ctr" cap="flat" w="38100">
+                      <a:solidFill>
+                        <a:srgbClr val="000000"/>
+                      </a:solidFill>
+                      <a:prstDash val="solid"/>
+                      <a:round/>
+                      <a:headEnd type="none" w="med" len="med"/>
+                      <a:tailEnd type="none" w="med" len="med"/>
+                    </a:lnL>
+                    <a:lnR cmpd="sng" algn="ctr" cap="flat" w="38100">
+                      <a:solidFill>
+                        <a:srgbClr val="000000"/>
+                      </a:solidFill>
+                      <a:prstDash val="solid"/>
+                      <a:round/>
+                      <a:headEnd type="none" w="med" len="med"/>
+                      <a:tailEnd type="none" w="med" len="med"/>
+                    </a:lnR>
+                    <a:lnT cmpd="sng" algn="ctr" cap="flat" w="38100">
+                      <a:solidFill>
+                        <a:srgbClr val="000000"/>
+                      </a:solidFill>
+                      <a:prstDash val="solid"/>
+                      <a:round/>
+                      <a:headEnd type="none" w="med" len="med"/>
+                      <a:tailEnd type="none" w="med" len="med"/>
+                    </a:lnT>
+                    <a:lnB cmpd="sng" algn="ctr" cap="flat" w="38100">
+                      <a:solidFill>
+                        <a:srgbClr val="000000"/>
+                      </a:solidFill>
+                      <a:prstDash val="solid"/>
+                      <a:round/>
+                      <a:headEnd type="none" w="med" len="med"/>
+                      <a:tailEnd type="none" w="med" len="med"/>
+                    </a:lnB>
+                  </a:tcPr>
+                </a:tc>
+              </a:tr>
+              <a:tr h="1473946">
+                <a:tc>
+                  <a:txBody>
+                    <a:bodyPr anchor="t" rtlCol="false"/>
+                    <a:lstStyle/>
+                    <a:p>
+                      <a:pPr algn="ctr">
+                        <a:lnSpc>
+                          <a:spcPts val="2659"/>
+                        </a:lnSpc>
+                        <a:defRPr/>
+                      </a:pPr>
+                      <a:endParaRPr lang="en-US" sz="1100"/>
+                    </a:p>
+                    <a:p>
+                      <a:pPr algn="ctr">
+                        <a:lnSpc>
+                          <a:spcPts val="2659"/>
+                        </a:lnSpc>
+                      </a:pPr>
+                      <a:r>
+                        <a:rPr lang="en-US" sz="1899">
+                          <a:solidFill>
+                            <a:srgbClr val="000000"/>
+                          </a:solidFill>
+                          <a:latin typeface="Times New Roman"/>
+                          <a:ea typeface="Times New Roman"/>
+                          <a:cs typeface="Times New Roman"/>
+                          <a:sym typeface="Times New Roman"/>
+                        </a:rPr>
+                        <a:t>  23ĐHTT04</a:t>
+                      </a:r>
+                    </a:p>
+                    <a:p>
+                      <a:pPr algn="ctr">
+                        <a:lnSpc>
+                          <a:spcPts val="2659"/>
+                        </a:lnSpc>
+                      </a:pPr>
+                      <a:r>
+                        <a:rPr lang="en-US" sz="1899">
+                          <a:solidFill>
+                            <a:srgbClr val="000000"/>
+                          </a:solidFill>
+                          <a:latin typeface="Times New Roman"/>
+                          <a:ea typeface="Times New Roman"/>
+                          <a:cs typeface="Times New Roman"/>
+                          <a:sym typeface="Times New Roman"/>
+                        </a:rPr>
+                        <a:t>  </a:t>
+                      </a:r>
+                    </a:p>
+                  </a:txBody>
+                  <a:tcPr marL="190500" marR="190500" marT="190500" marB="190500" anchor="ctr">
+                    <a:lnL cmpd="sng" algn="ctr" cap="flat" w="38100">
+                      <a:solidFill>
+                        <a:srgbClr val="000000"/>
+                      </a:solidFill>
+                      <a:prstDash val="solid"/>
+                      <a:round/>
+                      <a:headEnd type="none" w="med" len="med"/>
+                      <a:tailEnd type="none" w="med" len="med"/>
+                    </a:lnL>
+                    <a:lnR cmpd="sng" algn="ctr" cap="flat" w="38100">
+                      <a:solidFill>
+                        <a:srgbClr val="000000"/>
+                      </a:solidFill>
+                      <a:prstDash val="solid"/>
+                      <a:round/>
+                      <a:headEnd type="none" w="med" len="med"/>
+                      <a:tailEnd type="none" w="med" len="med"/>
+                    </a:lnR>
+                    <a:lnT cmpd="sng" algn="ctr" cap="flat" w="38100">
+                      <a:solidFill>
+                        <a:srgbClr val="000000"/>
+                      </a:solidFill>
+                      <a:prstDash val="solid"/>
+                      <a:round/>
+                      <a:headEnd type="none" w="med" len="med"/>
+                      <a:tailEnd type="none" w="med" len="med"/>
+                    </a:lnT>
+                    <a:lnB cmpd="sng" algn="ctr" cap="flat" w="38100">
+                      <a:solidFill>
+                        <a:srgbClr val="000000"/>
+                      </a:solidFill>
+                      <a:prstDash val="solid"/>
+                      <a:round/>
+                      <a:headEnd type="none" w="med" len="med"/>
+                      <a:tailEnd type="none" w="med" len="med"/>
+                    </a:lnB>
+                  </a:tcPr>
+                </a:tc>
+                <a:tc>
+                  <a:txBody>
+                    <a:bodyPr anchor="t" rtlCol="false"/>
+                    <a:lstStyle/>
+                    <a:p>
+                      <a:pPr algn="ctr">
+                        <a:lnSpc>
+                          <a:spcPts val="2659"/>
+                        </a:lnSpc>
+                        <a:defRPr/>
+                      </a:pPr>
+                      <a:endParaRPr lang="en-US" sz="1100"/>
+                    </a:p>
+                    <a:p>
+                      <a:pPr algn="ctr">
+                        <a:lnSpc>
+                          <a:spcPts val="2659"/>
+                        </a:lnSpc>
+                      </a:pPr>
+                      <a:r>
+                        <a:rPr lang="en-US" sz="1899">
+                          <a:solidFill>
+                            <a:srgbClr val="000000"/>
+                          </a:solidFill>
+                          <a:latin typeface="Times New Roman"/>
+                          <a:ea typeface="Times New Roman"/>
+                          <a:cs typeface="Times New Roman"/>
+                          <a:sym typeface="Times New Roman"/>
+                        </a:rPr>
+                        <a:t>  Tống Nhật Nam</a:t>
+                      </a:r>
+                    </a:p>
+                    <a:p>
+                      <a:pPr algn="ctr">
+                        <a:lnSpc>
+                          <a:spcPts val="2659"/>
+                        </a:lnSpc>
+                      </a:pPr>
+                      <a:r>
+                        <a:rPr lang="en-US" sz="1899">
+                          <a:solidFill>
+                            <a:srgbClr val="000000"/>
+                          </a:solidFill>
+                          <a:latin typeface="Times New Roman"/>
+                          <a:ea typeface="Times New Roman"/>
+                          <a:cs typeface="Times New Roman"/>
+                          <a:sym typeface="Times New Roman"/>
+                        </a:rPr>
+                        <a:t>  </a:t>
+                      </a:r>
+                    </a:p>
+                  </a:txBody>
+                  <a:tcPr marL="190500" marR="190500" marT="190500" marB="190500" anchor="ctr">
+                    <a:lnL cmpd="sng" algn="ctr" cap="flat" w="38100">
+                      <a:solidFill>
+                        <a:srgbClr val="000000"/>
+                      </a:solidFill>
+                      <a:prstDash val="solid"/>
+                      <a:round/>
+                      <a:headEnd type="none" w="med" len="med"/>
+                      <a:tailEnd type="none" w="med" len="med"/>
+                    </a:lnL>
+                    <a:lnR cmpd="sng" algn="ctr" cap="flat" w="38100">
+                      <a:solidFill>
+                        <a:srgbClr val="000000"/>
+                      </a:solidFill>
+                      <a:prstDash val="solid"/>
+                      <a:round/>
+                      <a:headEnd type="none" w="med" len="med"/>
+                      <a:tailEnd type="none" w="med" len="med"/>
+                    </a:lnR>
+                    <a:lnT cmpd="sng" algn="ctr" cap="flat" w="38100">
+                      <a:solidFill>
+                        <a:srgbClr val="000000"/>
+                      </a:solidFill>
+                      <a:prstDash val="solid"/>
+                      <a:round/>
+                      <a:headEnd type="none" w="med" len="med"/>
+                      <a:tailEnd type="none" w="med" len="med"/>
+                    </a:lnT>
+                    <a:lnB cmpd="sng" algn="ctr" cap="flat" w="38100">
+                      <a:solidFill>
+                        <a:srgbClr val="000000"/>
+                      </a:solidFill>
+                      <a:prstDash val="solid"/>
+                      <a:round/>
+                      <a:headEnd type="none" w="med" len="med"/>
+                      <a:tailEnd type="none" w="med" len="med"/>
+                    </a:lnB>
+                  </a:tcPr>
+                </a:tc>
+                <a:tc>
+                  <a:txBody>
+                    <a:bodyPr anchor="t" rtlCol="false"/>
+                    <a:lstStyle/>
+                    <a:p>
+                      <a:pPr algn="ctr">
+                        <a:lnSpc>
+                          <a:spcPts val="2659"/>
+                        </a:lnSpc>
+                        <a:defRPr/>
+                      </a:pPr>
+                      <a:endParaRPr lang="en-US" sz="1100"/>
+                    </a:p>
+                    <a:p>
+                      <a:pPr algn="ctr">
+                        <a:lnSpc>
+                          <a:spcPts val="2659"/>
+                        </a:lnSpc>
+                      </a:pPr>
+                      <a:r>
+                        <a:rPr lang="en-US" sz="1899">
+                          <a:solidFill>
+                            <a:srgbClr val="000000"/>
+                          </a:solidFill>
+                          <a:latin typeface="Times New Roman"/>
+                          <a:ea typeface="Times New Roman"/>
+                          <a:cs typeface="Times New Roman"/>
+                          <a:sym typeface="Times New Roman"/>
+                        </a:rPr>
+                        <a:t>  2331540184</a:t>
+                      </a:r>
+                    </a:p>
+                    <a:p>
+                      <a:pPr algn="ctr">
+                        <a:lnSpc>
+                          <a:spcPts val="2659"/>
+                        </a:lnSpc>
+                      </a:pPr>
+                      <a:r>
+                        <a:rPr lang="en-US" sz="1899">
+                          <a:solidFill>
+                            <a:srgbClr val="000000"/>
+                          </a:solidFill>
+                          <a:latin typeface="Times New Roman"/>
+                          <a:ea typeface="Times New Roman"/>
+                          <a:cs typeface="Times New Roman"/>
+                          <a:sym typeface="Times New Roman"/>
+                        </a:rPr>
+                        <a:t>  </a:t>
+                      </a:r>
+                    </a:p>
+                  </a:txBody>
+                  <a:tcPr marL="190500" marR="190500" marT="190500" marB="190500" anchor="ctr">
+                    <a:lnL cmpd="sng" algn="ctr" cap="flat" w="38100">
+                      <a:solidFill>
+                        <a:srgbClr val="000000"/>
+                      </a:solidFill>
+                      <a:prstDash val="solid"/>
+                      <a:round/>
+                      <a:headEnd type="none" w="med" len="med"/>
+                      <a:tailEnd type="none" w="med" len="med"/>
+                    </a:lnL>
+                    <a:lnR cmpd="sng" algn="ctr" cap="flat" w="38100">
+                      <a:solidFill>
+                        <a:srgbClr val="000000"/>
+                      </a:solidFill>
+                      <a:prstDash val="solid"/>
+                      <a:round/>
+                      <a:headEnd type="none" w="med" len="med"/>
+                      <a:tailEnd type="none" w="med" len="med"/>
+                    </a:lnR>
+                    <a:lnT cmpd="sng" algn="ctr" cap="flat" w="38100">
+                      <a:solidFill>
+                        <a:srgbClr val="000000"/>
+                      </a:solidFill>
+                      <a:prstDash val="solid"/>
+                      <a:round/>
+                      <a:headEnd type="none" w="med" len="med"/>
+                      <a:tailEnd type="none" w="med" len="med"/>
+                    </a:lnT>
+                    <a:lnB cmpd="sng" algn="ctr" cap="flat" w="38100">
+                      <a:solidFill>
+                        <a:srgbClr val="000000"/>
+                      </a:solidFill>
+                      <a:prstDash val="solid"/>
+                      <a:round/>
+                      <a:headEnd type="none" w="med" len="med"/>
+                      <a:tailEnd type="none" w="med" len="med"/>
+                    </a:lnB>
+                  </a:tcPr>
+                </a:tc>
+                <a:tc>
+                  <a:txBody>
+                    <a:bodyPr anchor="t" rtlCol="false"/>
+                    <a:lstStyle/>
+                    <a:p>
+                      <a:pPr algn="ctr">
+                        <a:lnSpc>
+                          <a:spcPts val="2659"/>
+                        </a:lnSpc>
+                        <a:defRPr/>
+                      </a:pPr>
+                      <a:endParaRPr lang="en-US" sz="1100"/>
+                    </a:p>
+                  </a:txBody>
+                  <a:tcPr marL="190500" marR="190500" marT="190500" marB="190500" anchor="ctr">
+                    <a:lnL cmpd="sng" algn="ctr" cap="flat" w="38100">
+                      <a:solidFill>
+                        <a:srgbClr val="000000"/>
+                      </a:solidFill>
+                      <a:prstDash val="solid"/>
+                      <a:round/>
+                      <a:headEnd type="none" w="med" len="med"/>
+                      <a:tailEnd type="none" w="med" len="med"/>
+                    </a:lnL>
+                    <a:lnR cmpd="sng" algn="ctr" cap="flat" w="38100">
+                      <a:solidFill>
+                        <a:srgbClr val="000000"/>
+                      </a:solidFill>
+                      <a:prstDash val="solid"/>
+                      <a:round/>
+                      <a:headEnd type="none" w="med" len="med"/>
+                      <a:tailEnd type="none" w="med" len="med"/>
+                    </a:lnR>
+                    <a:lnT cmpd="sng" algn="ctr" cap="flat" w="38100">
+                      <a:solidFill>
+                        <a:srgbClr val="000000"/>
+                      </a:solidFill>
+                      <a:prstDash val="solid"/>
+                      <a:round/>
+                      <a:headEnd type="none" w="med" len="med"/>
+                      <a:tailEnd type="none" w="med" len="med"/>
+                    </a:lnT>
+                    <a:lnB cmpd="sng" algn="ctr" cap="flat" w="38100">
+                      <a:solidFill>
+                        <a:srgbClr val="000000"/>
+                      </a:solidFill>
+                      <a:prstDash val="solid"/>
+                      <a:round/>
+                      <a:headEnd type="none" w="med" len="med"/>
+                      <a:tailEnd type="none" w="med" len="med"/>
+                    </a:lnB>
+                  </a:tcPr>
+                </a:tc>
+              </a:tr>
+              <a:tr h="1473946">
+                <a:tc>
+                  <a:txBody>
+                    <a:bodyPr anchor="t" rtlCol="false"/>
+                    <a:lstStyle/>
+                    <a:p>
+                      <a:pPr algn="ctr">
+                        <a:lnSpc>
+                          <a:spcPts val="2659"/>
+                        </a:lnSpc>
+                        <a:defRPr/>
+                      </a:pPr>
+                      <a:endParaRPr lang="en-US" sz="1100"/>
+                    </a:p>
+                    <a:p>
+                      <a:pPr algn="ctr">
+                        <a:lnSpc>
+                          <a:spcPts val="2659"/>
+                        </a:lnSpc>
+                      </a:pPr>
+                      <a:r>
+                        <a:rPr lang="en-US" sz="1899">
+                          <a:solidFill>
+                            <a:srgbClr val="000000"/>
+                          </a:solidFill>
+                          <a:latin typeface="Times New Roman"/>
+                          <a:ea typeface="Times New Roman"/>
+                          <a:cs typeface="Times New Roman"/>
+                          <a:sym typeface="Times New Roman"/>
+                        </a:rPr>
+                        <a:t>  24ĐHTT04</a:t>
+                      </a:r>
+                    </a:p>
+                    <a:p>
+                      <a:pPr algn="ctr">
+                        <a:lnSpc>
+                          <a:spcPts val="2659"/>
+                        </a:lnSpc>
+                      </a:pPr>
+                      <a:r>
+                        <a:rPr lang="en-US" sz="1899">
+                          <a:solidFill>
+                            <a:srgbClr val="000000"/>
+                          </a:solidFill>
+                          <a:latin typeface="Times New Roman"/>
+                          <a:ea typeface="Times New Roman"/>
+                          <a:cs typeface="Times New Roman"/>
+                          <a:sym typeface="Times New Roman"/>
+                        </a:rPr>
+                        <a:t>  </a:t>
+                      </a:r>
+                    </a:p>
+                  </a:txBody>
+                  <a:tcPr marL="190500" marR="190500" marT="190500" marB="190500" anchor="ctr">
+                    <a:lnL cmpd="sng" algn="ctr" cap="flat" w="38100">
+                      <a:solidFill>
+                        <a:srgbClr val="000000"/>
+                      </a:solidFill>
+                      <a:prstDash val="solid"/>
+                      <a:round/>
+                      <a:headEnd type="none" w="med" len="med"/>
+                      <a:tailEnd type="none" w="med" len="med"/>
+                    </a:lnL>
+                    <a:lnR cmpd="sng" algn="ctr" cap="flat" w="38100">
+                      <a:solidFill>
+                        <a:srgbClr val="000000"/>
+                      </a:solidFill>
+                      <a:prstDash val="solid"/>
+                      <a:round/>
+                      <a:headEnd type="none" w="med" len="med"/>
+                      <a:tailEnd type="none" w="med" len="med"/>
+                    </a:lnR>
+                    <a:lnT cmpd="sng" algn="ctr" cap="flat" w="38100">
+                      <a:solidFill>
+                        <a:srgbClr val="000000"/>
+                      </a:solidFill>
+                      <a:prstDash val="solid"/>
+                      <a:round/>
+                      <a:headEnd type="none" w="med" len="med"/>
+                      <a:tailEnd type="none" w="med" len="med"/>
+                    </a:lnT>
+                    <a:lnB cmpd="sng" algn="ctr" cap="flat" w="38100">
+                      <a:solidFill>
+                        <a:srgbClr val="000000"/>
+                      </a:solidFill>
+                      <a:prstDash val="solid"/>
+                      <a:round/>
+                      <a:headEnd type="none" w="med" len="med"/>
+                      <a:tailEnd type="none" w="med" len="med"/>
+                    </a:lnB>
+                  </a:tcPr>
+                </a:tc>
+                <a:tc>
+                  <a:txBody>
+                    <a:bodyPr anchor="t" rtlCol="false"/>
+                    <a:lstStyle/>
+                    <a:p>
+                      <a:pPr algn="ctr">
+                        <a:lnSpc>
+                          <a:spcPts val="2659"/>
+                        </a:lnSpc>
+                        <a:defRPr/>
+                      </a:pPr>
+                      <a:endParaRPr lang="en-US" sz="1100"/>
+                    </a:p>
+                    <a:p>
+                      <a:pPr algn="ctr">
+                        <a:lnSpc>
+                          <a:spcPts val="2659"/>
+                        </a:lnSpc>
+                      </a:pPr>
+                      <a:r>
+                        <a:rPr lang="en-US" sz="1899">
+                          <a:solidFill>
+                            <a:srgbClr val="000000"/>
+                          </a:solidFill>
+                          <a:latin typeface="Times New Roman"/>
+                          <a:ea typeface="Times New Roman"/>
+                          <a:cs typeface="Times New Roman"/>
+                          <a:sym typeface="Times New Roman"/>
+                        </a:rPr>
+                        <a:t>  Võ Trí Thanh</a:t>
+                      </a:r>
+                    </a:p>
+                    <a:p>
+                      <a:pPr algn="ctr">
+                        <a:lnSpc>
+                          <a:spcPts val="2659"/>
+                        </a:lnSpc>
+                      </a:pPr>
+                      <a:r>
+                        <a:rPr lang="en-US" sz="1899">
+                          <a:solidFill>
+                            <a:srgbClr val="000000"/>
+                          </a:solidFill>
+                          <a:latin typeface="Times New Roman"/>
+                          <a:ea typeface="Times New Roman"/>
+                          <a:cs typeface="Times New Roman"/>
+                          <a:sym typeface="Times New Roman"/>
+                        </a:rPr>
+                        <a:t>  </a:t>
+                      </a:r>
+                    </a:p>
+                  </a:txBody>
+                  <a:tcPr marL="190500" marR="190500" marT="190500" marB="190500" anchor="ctr">
+                    <a:lnL cmpd="sng" algn="ctr" cap="flat" w="38100">
+                      <a:solidFill>
+                        <a:srgbClr val="000000"/>
+                      </a:solidFill>
+                      <a:prstDash val="solid"/>
+                      <a:round/>
+                      <a:headEnd type="none" w="med" len="med"/>
+                      <a:tailEnd type="none" w="med" len="med"/>
+                    </a:lnL>
+                    <a:lnR cmpd="sng" algn="ctr" cap="flat" w="38100">
+                      <a:solidFill>
+                        <a:srgbClr val="000000"/>
+                      </a:solidFill>
+                      <a:prstDash val="solid"/>
+                      <a:round/>
+                      <a:headEnd type="none" w="med" len="med"/>
+                      <a:tailEnd type="none" w="med" len="med"/>
+                    </a:lnR>
+                    <a:lnT cmpd="sng" algn="ctr" cap="flat" w="38100">
+                      <a:solidFill>
+                        <a:srgbClr val="000000"/>
+                      </a:solidFill>
+                      <a:prstDash val="solid"/>
+                      <a:round/>
+                      <a:headEnd type="none" w="med" len="med"/>
+                      <a:tailEnd type="none" w="med" len="med"/>
+                    </a:lnT>
+                    <a:lnB cmpd="sng" algn="ctr" cap="flat" w="38100">
+                      <a:solidFill>
+                        <a:srgbClr val="000000"/>
+                      </a:solidFill>
+                      <a:prstDash val="solid"/>
+                      <a:round/>
+                      <a:headEnd type="none" w="med" len="med"/>
+                      <a:tailEnd type="none" w="med" len="med"/>
+                    </a:lnB>
+                  </a:tcPr>
+                </a:tc>
+                <a:tc>
+                  <a:txBody>
+                    <a:bodyPr anchor="t" rtlCol="false"/>
+                    <a:lstStyle/>
+                    <a:p>
+                      <a:pPr algn="ctr">
+                        <a:lnSpc>
+                          <a:spcPts val="2659"/>
+                        </a:lnSpc>
+                        <a:defRPr/>
+                      </a:pPr>
+                      <a:endParaRPr lang="en-US" sz="1100"/>
+                    </a:p>
+                    <a:p>
+                      <a:pPr algn="ctr">
+                        <a:lnSpc>
+                          <a:spcPts val="2659"/>
+                        </a:lnSpc>
+                      </a:pPr>
+                      <a:r>
+                        <a:rPr lang="en-US" sz="1899">
+                          <a:solidFill>
+                            <a:srgbClr val="000000"/>
+                          </a:solidFill>
+                          <a:latin typeface="Times New Roman"/>
+                          <a:ea typeface="Times New Roman"/>
+                          <a:cs typeface="Times New Roman"/>
+                          <a:sym typeface="Times New Roman"/>
+                        </a:rPr>
+                        <a:t>  2431540218</a:t>
+                      </a:r>
+                    </a:p>
+                    <a:p>
+                      <a:pPr algn="ctr">
+                        <a:lnSpc>
+                          <a:spcPts val="2659"/>
+                        </a:lnSpc>
+                      </a:pPr>
+                      <a:r>
+                        <a:rPr lang="en-US" sz="1899">
+                          <a:solidFill>
+                            <a:srgbClr val="000000"/>
+                          </a:solidFill>
+                          <a:latin typeface="Times New Roman"/>
+                          <a:ea typeface="Times New Roman"/>
+                          <a:cs typeface="Times New Roman"/>
+                          <a:sym typeface="Times New Roman"/>
+                        </a:rPr>
+                        <a:t>  </a:t>
+                      </a:r>
+                    </a:p>
+                  </a:txBody>
+                  <a:tcPr marL="190500" marR="190500" marT="190500" marB="190500" anchor="ctr">
+                    <a:lnL cmpd="sng" algn="ctr" cap="flat" w="38100">
+                      <a:solidFill>
+                        <a:srgbClr val="000000"/>
+                      </a:solidFill>
+                      <a:prstDash val="solid"/>
+                      <a:round/>
+                      <a:headEnd type="none" w="med" len="med"/>
+                      <a:tailEnd type="none" w="med" len="med"/>
+                    </a:lnL>
+                    <a:lnR cmpd="sng" algn="ctr" cap="flat" w="38100">
+                      <a:solidFill>
+                        <a:srgbClr val="000000"/>
+                      </a:solidFill>
+                      <a:prstDash val="solid"/>
+                      <a:round/>
+                      <a:headEnd type="none" w="med" len="med"/>
+                      <a:tailEnd type="none" w="med" len="med"/>
+                    </a:lnR>
+                    <a:lnT cmpd="sng" algn="ctr" cap="flat" w="38100">
+                      <a:solidFill>
+                        <a:srgbClr val="000000"/>
+                      </a:solidFill>
+                      <a:prstDash val="solid"/>
+                      <a:round/>
+                      <a:headEnd type="none" w="med" len="med"/>
+                      <a:tailEnd type="none" w="med" len="med"/>
+                    </a:lnT>
+                    <a:lnB cmpd="sng" algn="ctr" cap="flat" w="38100">
+                      <a:solidFill>
+                        <a:srgbClr val="000000"/>
+                      </a:solidFill>
+                      <a:prstDash val="solid"/>
+                      <a:round/>
+                      <a:headEnd type="none" w="med" len="med"/>
+                      <a:tailEnd type="none" w="med" len="med"/>
+                    </a:lnB>
+                  </a:tcPr>
+                </a:tc>
+                <a:tc>
+                  <a:txBody>
+                    <a:bodyPr anchor="t" rtlCol="false"/>
+                    <a:lstStyle/>
+                    <a:p>
+                      <a:pPr algn="ctr">
+                        <a:lnSpc>
+                          <a:spcPts val="2659"/>
+                        </a:lnSpc>
+                        <a:defRPr/>
+                      </a:pPr>
+                      <a:endParaRPr lang="en-US" sz="1100"/>
+                    </a:p>
+                  </a:txBody>
+                  <a:tcPr marL="190500" marR="190500" marT="190500" marB="190500" anchor="ctr">
+                    <a:lnL cmpd="sng" algn="ctr" cap="flat" w="38100">
+                      <a:solidFill>
+                        <a:srgbClr val="000000"/>
+                      </a:solidFill>
+                      <a:prstDash val="solid"/>
+                      <a:round/>
+                      <a:headEnd type="none" w="med" len="med"/>
+                      <a:tailEnd type="none" w="med" len="med"/>
+                    </a:lnL>
+                    <a:lnR cmpd="sng" algn="ctr" cap="flat" w="38100">
+                      <a:solidFill>
+                        <a:srgbClr val="000000"/>
+                      </a:solidFill>
+                      <a:prstDash val="solid"/>
+                      <a:round/>
+                      <a:headEnd type="none" w="med" len="med"/>
+                      <a:tailEnd type="none" w="med" len="med"/>
+                    </a:lnR>
+                    <a:lnT cmpd="sng" algn="ctr" cap="flat" w="38100">
+                      <a:solidFill>
+                        <a:srgbClr val="000000"/>
+                      </a:solidFill>
+                      <a:prstDash val="solid"/>
+                      <a:round/>
+                      <a:headEnd type="none" w="med" len="med"/>
+                      <a:tailEnd type="none" w="med" len="med"/>
+                    </a:lnT>
+                    <a:lnB cmpd="sng" algn="ctr" cap="flat" w="38100">
+                      <a:solidFill>
+                        <a:srgbClr val="000000"/>
+                      </a:solidFill>
+                      <a:prstDash val="solid"/>
+                      <a:round/>
+                      <a:headEnd type="none" w="med" len="med"/>
+                      <a:tailEnd type="none" w="med" len="med"/>
+                    </a:lnB>
+                  </a:tcPr>
+                </a:tc>
+              </a:tr>
+            </a:tbl>
+          </a:graphicData>
+        </a:graphic>
+      </p:graphicFrame>
+    </p:spTree>
+  </p:cSld>
+  <p:clrMapOvr>
+    <a:masterClrMapping/>
+  </p:clrMapOvr>
+</p:sld>
+</file>
+
+<file path=ppt/slides/slide3.xml><?xml version="1.0" encoding="utf-8"?>
 <p:sld xmlns:p="http://schemas.openxmlformats.org/presentationml/2006/main" xmlns:a="http://schemas.openxmlformats.org/drawingml/2006/main" xmlns:r="http://schemas.openxmlformats.org/officeDocument/2006/relationships">
   <p:cSld>
     <p:spTree>
@@ -4738,7 +7691,7 @@
 </p:sld>
 </file>
 
-<file path=ppt/slides/slide3.xml><?xml version="1.0" encoding="utf-8"?>
+<file path=ppt/slides/slide4.xml><?xml version="1.0" encoding="utf-8"?>
 <p:sld xmlns:p="http://schemas.openxmlformats.org/presentationml/2006/main" xmlns:a="http://schemas.openxmlformats.org/drawingml/2006/main" xmlns:r="http://schemas.openxmlformats.org/officeDocument/2006/relationships">
   <p:cSld>
     <p:spTree>
@@ -5160,488 +8113,6 @@
           </a:custGeom>
           <a:blipFill>
             <a:blip r:embed="rId12"/>
-            <a:stretch>
-              <a:fillRect l="0" t="0" r="0" b="0"/>
-            </a:stretch>
-          </a:blipFill>
-        </p:spPr>
-      </p:sp>
-    </p:spTree>
-  </p:cSld>
-  <p:clrMapOvr>
-    <a:masterClrMapping/>
-  </p:clrMapOvr>
-</p:sld>
-</file>
-
-<file path=ppt/slides/slide4.xml><?xml version="1.0" encoding="utf-8"?>
-<p:sld xmlns:p="http://schemas.openxmlformats.org/presentationml/2006/main" xmlns:a="http://schemas.openxmlformats.org/drawingml/2006/main" xmlns:r="http://schemas.openxmlformats.org/officeDocument/2006/relationships">
-  <p:cSld>
-    <p:spTree>
-      <p:nvGrpSpPr>
-        <p:cNvPr id="1" name=""/>
-        <p:cNvGrpSpPr/>
-        <p:nvPr/>
-      </p:nvGrpSpPr>
-      <p:grpSpPr>
-        <a:xfrm>
-          <a:off x="0" y="0"/>
-          <a:ext cx="0" cy="0"/>
-          <a:chOff x="0" y="0"/>
-          <a:chExt cx="0" cy="0"/>
-        </a:xfrm>
-      </p:grpSpPr>
-      <p:sp>
-        <p:nvSpPr>
-          <p:cNvPr name="Freeform 2" id="2"/>
-          <p:cNvSpPr/>
-          <p:nvPr/>
-        </p:nvSpPr>
-        <p:spPr>
-          <a:xfrm flipH="false" flipV="false" rot="-5400000">
-            <a:off x="3955719" y="-5233061"/>
-            <a:ext cx="10376561" cy="20753122"/>
-          </a:xfrm>
-          <a:custGeom>
-            <a:avLst/>
-            <a:gdLst/>
-            <a:ahLst/>
-            <a:cxnLst/>
-            <a:rect r="r" b="b" t="t" l="l"/>
-            <a:pathLst>
-              <a:path h="20753122" w="10376561">
-                <a:moveTo>
-                  <a:pt x="0" y="0"/>
-                </a:moveTo>
-                <a:lnTo>
-                  <a:pt x="10376562" y="0"/>
-                </a:lnTo>
-                <a:lnTo>
-                  <a:pt x="10376562" y="20753122"/>
-                </a:lnTo>
-                <a:lnTo>
-                  <a:pt x="0" y="20753122"/>
-                </a:lnTo>
-                <a:lnTo>
-                  <a:pt x="0" y="0"/>
-                </a:lnTo>
-                <a:close/>
-              </a:path>
-            </a:pathLst>
-          </a:custGeom>
-          <a:blipFill>
-            <a:blip r:embed="rId2">
-              <a:alphaModFix amt="5000"/>
-              <a:extLst>
-                <a:ext uri="{96DAC541-7B7A-43D3-8B79-37D633B846F1}">
-                  <asvg:svgBlip xmlns:asvg="http://schemas.microsoft.com/office/drawing/2016/SVG/main" r:embed="rId3"/>
-                </a:ext>
-              </a:extLst>
-            </a:blip>
-            <a:stretch>
-              <a:fillRect l="0" t="0" r="0" b="0"/>
-            </a:stretch>
-          </a:blipFill>
-        </p:spPr>
-      </p:sp>
-      <p:sp>
-        <p:nvSpPr>
-          <p:cNvPr name="Freeform 3" id="3"/>
-          <p:cNvSpPr/>
-          <p:nvPr/>
-        </p:nvSpPr>
-        <p:spPr>
-          <a:xfrm flipH="false" flipV="false" rot="1365716">
-            <a:off x="-12242" y="1558425"/>
-            <a:ext cx="3119438" cy="3102422"/>
-          </a:xfrm>
-          <a:custGeom>
-            <a:avLst/>
-            <a:gdLst/>
-            <a:ahLst/>
-            <a:cxnLst/>
-            <a:rect r="r" b="b" t="t" l="l"/>
-            <a:pathLst>
-              <a:path h="3102422" w="3119438">
-                <a:moveTo>
-                  <a:pt x="0" y="0"/>
-                </a:moveTo>
-                <a:lnTo>
-                  <a:pt x="3119437" y="0"/>
-                </a:lnTo>
-                <a:lnTo>
-                  <a:pt x="3119437" y="3102423"/>
-                </a:lnTo>
-                <a:lnTo>
-                  <a:pt x="0" y="3102423"/>
-                </a:lnTo>
-                <a:lnTo>
-                  <a:pt x="0" y="0"/>
-                </a:lnTo>
-                <a:close/>
-              </a:path>
-            </a:pathLst>
-          </a:custGeom>
-          <a:blipFill>
-            <a:blip r:embed="rId4">
-              <a:extLst>
-                <a:ext uri="{96DAC541-7B7A-43D3-8B79-37D633B846F1}">
-                  <asvg:svgBlip xmlns:asvg="http://schemas.microsoft.com/office/drawing/2016/SVG/main" r:embed="rId5"/>
-                </a:ext>
-              </a:extLst>
-            </a:blip>
-            <a:stretch>
-              <a:fillRect l="0" t="0" r="0" b="0"/>
-            </a:stretch>
-          </a:blipFill>
-        </p:spPr>
-      </p:sp>
-      <p:sp>
-        <p:nvSpPr>
-          <p:cNvPr name="Freeform 4" id="4"/>
-          <p:cNvSpPr/>
-          <p:nvPr/>
-        </p:nvSpPr>
-        <p:spPr>
-          <a:xfrm flipH="false" flipV="false" rot="-1409927">
-            <a:off x="15498369" y="5282412"/>
-            <a:ext cx="3017828" cy="3039937"/>
-          </a:xfrm>
-          <a:custGeom>
-            <a:avLst/>
-            <a:gdLst/>
-            <a:ahLst/>
-            <a:cxnLst/>
-            <a:rect r="r" b="b" t="t" l="l"/>
-            <a:pathLst>
-              <a:path h="3039937" w="3017828">
-                <a:moveTo>
-                  <a:pt x="0" y="0"/>
-                </a:moveTo>
-                <a:lnTo>
-                  <a:pt x="3017829" y="0"/>
-                </a:lnTo>
-                <a:lnTo>
-                  <a:pt x="3017829" y="3039937"/>
-                </a:lnTo>
-                <a:lnTo>
-                  <a:pt x="0" y="3039937"/>
-                </a:lnTo>
-                <a:lnTo>
-                  <a:pt x="0" y="0"/>
-                </a:lnTo>
-                <a:close/>
-              </a:path>
-            </a:pathLst>
-          </a:custGeom>
-          <a:blipFill>
-            <a:blip r:embed="rId6">
-              <a:extLst>
-                <a:ext uri="{96DAC541-7B7A-43D3-8B79-37D633B846F1}">
-                  <asvg:svgBlip xmlns:asvg="http://schemas.microsoft.com/office/drawing/2016/SVG/main" r:embed="rId7"/>
-                </a:ext>
-              </a:extLst>
-            </a:blip>
-            <a:stretch>
-              <a:fillRect l="0" t="0" r="0" b="0"/>
-            </a:stretch>
-          </a:blipFill>
-        </p:spPr>
-      </p:sp>
-      <p:sp>
-        <p:nvSpPr>
-          <p:cNvPr name="Freeform 5" id="5"/>
-          <p:cNvSpPr/>
-          <p:nvPr/>
-        </p:nvSpPr>
-        <p:spPr>
-          <a:xfrm flipH="false" flipV="false" rot="0">
-            <a:off x="15247497" y="1720250"/>
-            <a:ext cx="1504614" cy="248945"/>
-          </a:xfrm>
-          <a:custGeom>
-            <a:avLst/>
-            <a:gdLst/>
-            <a:ahLst/>
-            <a:cxnLst/>
-            <a:rect r="r" b="b" t="t" l="l"/>
-            <a:pathLst>
-              <a:path h="248945" w="1504614">
-                <a:moveTo>
-                  <a:pt x="0" y="0"/>
-                </a:moveTo>
-                <a:lnTo>
-                  <a:pt x="1504614" y="0"/>
-                </a:lnTo>
-                <a:lnTo>
-                  <a:pt x="1504614" y="248946"/>
-                </a:lnTo>
-                <a:lnTo>
-                  <a:pt x="0" y="248946"/>
-                </a:lnTo>
-                <a:lnTo>
-                  <a:pt x="0" y="0"/>
-                </a:lnTo>
-                <a:close/>
-              </a:path>
-            </a:pathLst>
-          </a:custGeom>
-          <a:blipFill>
-            <a:blip r:embed="rId8">
-              <a:extLst>
-                <a:ext uri="{96DAC541-7B7A-43D3-8B79-37D633B846F1}">
-                  <asvg:svgBlip xmlns:asvg="http://schemas.microsoft.com/office/drawing/2016/SVG/main" r:embed="rId9"/>
-                </a:ext>
-              </a:extLst>
-            </a:blip>
-            <a:stretch>
-              <a:fillRect l="0" t="0" r="0" b="0"/>
-            </a:stretch>
-          </a:blipFill>
-        </p:spPr>
-      </p:sp>
-      <p:sp>
-        <p:nvSpPr>
-          <p:cNvPr name="Freeform 6" id="6"/>
-          <p:cNvSpPr/>
-          <p:nvPr/>
-        </p:nvSpPr>
-        <p:spPr>
-          <a:xfrm flipH="false" flipV="false" rot="0">
-            <a:off x="1285233" y="8548999"/>
-            <a:ext cx="1504614" cy="248945"/>
-          </a:xfrm>
-          <a:custGeom>
-            <a:avLst/>
-            <a:gdLst/>
-            <a:ahLst/>
-            <a:cxnLst/>
-            <a:rect r="r" b="b" t="t" l="l"/>
-            <a:pathLst>
-              <a:path h="248945" w="1504614">
-                <a:moveTo>
-                  <a:pt x="0" y="0"/>
-                </a:moveTo>
-                <a:lnTo>
-                  <a:pt x="1504614" y="0"/>
-                </a:lnTo>
-                <a:lnTo>
-                  <a:pt x="1504614" y="248945"/>
-                </a:lnTo>
-                <a:lnTo>
-                  <a:pt x="0" y="248945"/>
-                </a:lnTo>
-                <a:lnTo>
-                  <a:pt x="0" y="0"/>
-                </a:lnTo>
-                <a:close/>
-              </a:path>
-            </a:pathLst>
-          </a:custGeom>
-          <a:blipFill>
-            <a:blip r:embed="rId8">
-              <a:extLst>
-                <a:ext uri="{96DAC541-7B7A-43D3-8B79-37D633B846F1}">
-                  <asvg:svgBlip xmlns:asvg="http://schemas.microsoft.com/office/drawing/2016/SVG/main" r:embed="rId9"/>
-                </a:ext>
-              </a:extLst>
-            </a:blip>
-            <a:stretch>
-              <a:fillRect l="0" t="0" r="0" b="0"/>
-            </a:stretch>
-          </a:blipFill>
-        </p:spPr>
-      </p:sp>
-      <p:sp>
-        <p:nvSpPr>
-          <p:cNvPr name="Freeform 7" id="7"/>
-          <p:cNvSpPr/>
-          <p:nvPr/>
-        </p:nvSpPr>
-        <p:spPr>
-          <a:xfrm flipH="false" flipV="false" rot="0">
-            <a:off x="14931897" y="3540994"/>
-            <a:ext cx="631200" cy="611690"/>
-          </a:xfrm>
-          <a:custGeom>
-            <a:avLst/>
-            <a:gdLst/>
-            <a:ahLst/>
-            <a:cxnLst/>
-            <a:rect r="r" b="b" t="t" l="l"/>
-            <a:pathLst>
-              <a:path h="611690" w="631200">
-                <a:moveTo>
-                  <a:pt x="0" y="0"/>
-                </a:moveTo>
-                <a:lnTo>
-                  <a:pt x="631199" y="0"/>
-                </a:lnTo>
-                <a:lnTo>
-                  <a:pt x="631199" y="611690"/>
-                </a:lnTo>
-                <a:lnTo>
-                  <a:pt x="0" y="611690"/>
-                </a:lnTo>
-                <a:lnTo>
-                  <a:pt x="0" y="0"/>
-                </a:lnTo>
-                <a:close/>
-              </a:path>
-            </a:pathLst>
-          </a:custGeom>
-          <a:blipFill>
-            <a:blip r:embed="rId10">
-              <a:extLst>
-                <a:ext uri="{96DAC541-7B7A-43D3-8B79-37D633B846F1}">
-                  <asvg:svgBlip xmlns:asvg="http://schemas.microsoft.com/office/drawing/2016/SVG/main" r:embed="rId11"/>
-                </a:ext>
-              </a:extLst>
-            </a:blip>
-            <a:stretch>
-              <a:fillRect l="0" t="0" r="0" b="0"/>
-            </a:stretch>
-          </a:blipFill>
-        </p:spPr>
-      </p:sp>
-      <p:sp>
-        <p:nvSpPr>
-          <p:cNvPr name="Freeform 8" id="8"/>
-          <p:cNvSpPr/>
-          <p:nvPr/>
-        </p:nvSpPr>
-        <p:spPr>
-          <a:xfrm flipH="false" flipV="false" rot="0">
-            <a:off x="2474248" y="6190690"/>
-            <a:ext cx="631200" cy="611690"/>
-          </a:xfrm>
-          <a:custGeom>
-            <a:avLst/>
-            <a:gdLst/>
-            <a:ahLst/>
-            <a:cxnLst/>
-            <a:rect r="r" b="b" t="t" l="l"/>
-            <a:pathLst>
-              <a:path h="611690" w="631200">
-                <a:moveTo>
-                  <a:pt x="0" y="0"/>
-                </a:moveTo>
-                <a:lnTo>
-                  <a:pt x="631199" y="0"/>
-                </a:lnTo>
-                <a:lnTo>
-                  <a:pt x="631199" y="611690"/>
-                </a:lnTo>
-                <a:lnTo>
-                  <a:pt x="0" y="611690"/>
-                </a:lnTo>
-                <a:lnTo>
-                  <a:pt x="0" y="0"/>
-                </a:lnTo>
-                <a:close/>
-              </a:path>
-            </a:pathLst>
-          </a:custGeom>
-          <a:blipFill>
-            <a:blip r:embed="rId10">
-              <a:extLst>
-                <a:ext uri="{96DAC541-7B7A-43D3-8B79-37D633B846F1}">
-                  <asvg:svgBlip xmlns:asvg="http://schemas.microsoft.com/office/drawing/2016/SVG/main" r:embed="rId11"/>
-                </a:ext>
-              </a:extLst>
-            </a:blip>
-            <a:stretch>
-              <a:fillRect l="0" t="0" r="0" b="0"/>
-            </a:stretch>
-          </a:blipFill>
-        </p:spPr>
-      </p:sp>
-      <p:sp>
-        <p:nvSpPr>
-          <p:cNvPr name="Freeform 9" id="9"/>
-          <p:cNvSpPr/>
-          <p:nvPr/>
-        </p:nvSpPr>
-        <p:spPr>
-          <a:xfrm flipH="false" flipV="false" rot="0">
-            <a:off x="7467064" y="3328861"/>
-            <a:ext cx="6572380" cy="4965798"/>
-          </a:xfrm>
-          <a:custGeom>
-            <a:avLst/>
-            <a:gdLst/>
-            <a:ahLst/>
-            <a:cxnLst/>
-            <a:rect r="r" b="b" t="t" l="l"/>
-            <a:pathLst>
-              <a:path h="4965798" w="6572380">
-                <a:moveTo>
-                  <a:pt x="0" y="0"/>
-                </a:moveTo>
-                <a:lnTo>
-                  <a:pt x="6572380" y="0"/>
-                </a:lnTo>
-                <a:lnTo>
-                  <a:pt x="6572380" y="4965798"/>
-                </a:lnTo>
-                <a:lnTo>
-                  <a:pt x="0" y="4965798"/>
-                </a:lnTo>
-                <a:lnTo>
-                  <a:pt x="0" y="0"/>
-                </a:lnTo>
-                <a:close/>
-              </a:path>
-            </a:pathLst>
-          </a:custGeom>
-          <a:blipFill>
-            <a:blip r:embed="rId12"/>
-            <a:stretch>
-              <a:fillRect l="0" t="0" r="0" b="0"/>
-            </a:stretch>
-          </a:blipFill>
-        </p:spPr>
-      </p:sp>
-      <p:sp>
-        <p:nvSpPr>
-          <p:cNvPr name="Freeform 10" id="10"/>
-          <p:cNvSpPr/>
-          <p:nvPr/>
-        </p:nvSpPr>
-        <p:spPr>
-          <a:xfrm flipH="false" flipV="false" rot="0">
-            <a:off x="1547476" y="3478098"/>
-            <a:ext cx="5919587" cy="5070901"/>
-          </a:xfrm>
-          <a:custGeom>
-            <a:avLst/>
-            <a:gdLst/>
-            <a:ahLst/>
-            <a:cxnLst/>
-            <a:rect r="r" b="b" t="t" l="l"/>
-            <a:pathLst>
-              <a:path h="5070901" w="5919587">
-                <a:moveTo>
-                  <a:pt x="0" y="0"/>
-                </a:moveTo>
-                <a:lnTo>
-                  <a:pt x="5919588" y="0"/>
-                </a:lnTo>
-                <a:lnTo>
-                  <a:pt x="5919588" y="5070901"/>
-                </a:lnTo>
-                <a:lnTo>
-                  <a:pt x="0" y="5070901"/>
-                </a:lnTo>
-                <a:lnTo>
-                  <a:pt x="0" y="0"/>
-                </a:lnTo>
-                <a:close/>
-              </a:path>
-            </a:pathLst>
-          </a:custGeom>
-          <a:blipFill>
-            <a:blip r:embed="rId13"/>
             <a:stretch>
               <a:fillRect l="0" t="0" r="0" b="0"/>
             </a:stretch>
@@ -6046,8 +8517,8 @@
         </p:nvSpPr>
         <p:spPr>
           <a:xfrm flipH="false" flipV="false" rot="0">
-            <a:off x="8698209" y="3336396"/>
-            <a:ext cx="6549288" cy="5029317"/>
+            <a:off x="7467064" y="3328861"/>
+            <a:ext cx="6572380" cy="4965798"/>
           </a:xfrm>
           <a:custGeom>
             <a:avLst/>
@@ -6056,18 +8527,18 @@
             <a:cxnLst/>
             <a:rect r="r" b="b" t="t" l="l"/>
             <a:pathLst>
-              <a:path h="5029317" w="6549288">
+              <a:path h="4965798" w="6572380">
                 <a:moveTo>
                   <a:pt x="0" y="0"/>
                 </a:moveTo>
                 <a:lnTo>
-                  <a:pt x="6549288" y="0"/>
-                </a:lnTo>
-                <a:lnTo>
-                  <a:pt x="6549288" y="5029317"/>
-                </a:lnTo>
-                <a:lnTo>
-                  <a:pt x="0" y="5029317"/>
+                  <a:pt x="6572380" y="0"/>
+                </a:lnTo>
+                <a:lnTo>
+                  <a:pt x="6572380" y="4965798"/>
+                </a:lnTo>
+                <a:lnTo>
+                  <a:pt x="0" y="4965798"/>
                 </a:lnTo>
                 <a:lnTo>
                   <a:pt x="0" y="0"/>
@@ -6092,8 +8563,8 @@
         </p:nvSpPr>
         <p:spPr>
           <a:xfrm flipH="false" flipV="false" rot="0">
-            <a:off x="2262285" y="3540994"/>
-            <a:ext cx="6435924" cy="4935056"/>
+            <a:off x="1547476" y="3478098"/>
+            <a:ext cx="5919587" cy="5070901"/>
           </a:xfrm>
           <a:custGeom>
             <a:avLst/>
@@ -6102,18 +8573,18 @@
             <a:cxnLst/>
             <a:rect r="r" b="b" t="t" l="l"/>
             <a:pathLst>
-              <a:path h="4935056" w="6435924">
+              <a:path h="5070901" w="5919587">
                 <a:moveTo>
                   <a:pt x="0" y="0"/>
                 </a:moveTo>
                 <a:lnTo>
-                  <a:pt x="6435924" y="0"/>
-                </a:lnTo>
-                <a:lnTo>
-                  <a:pt x="6435924" y="4935056"/>
-                </a:lnTo>
-                <a:lnTo>
-                  <a:pt x="0" y="4935056"/>
+                  <a:pt x="5919588" y="0"/>
+                </a:lnTo>
+                <a:lnTo>
+                  <a:pt x="5919588" y="5070901"/>
+                </a:lnTo>
+                <a:lnTo>
+                  <a:pt x="0" y="5070901"/>
                 </a:lnTo>
                 <a:lnTo>
                   <a:pt x="0" y="0"/>
@@ -6528,8 +8999,8 @@
         </p:nvSpPr>
         <p:spPr>
           <a:xfrm flipH="false" flipV="false" rot="0">
-            <a:off x="8217614" y="3644955"/>
-            <a:ext cx="6637854" cy="4990160"/>
+            <a:off x="8698209" y="3336396"/>
+            <a:ext cx="6549288" cy="5029317"/>
           </a:xfrm>
           <a:custGeom>
             <a:avLst/>
@@ -6538,18 +9009,18 @@
             <a:cxnLst/>
             <a:rect r="r" b="b" t="t" l="l"/>
             <a:pathLst>
-              <a:path h="4990160" w="6637854">
+              <a:path h="5029317" w="6549288">
                 <a:moveTo>
                   <a:pt x="0" y="0"/>
                 </a:moveTo>
                 <a:lnTo>
-                  <a:pt x="6637855" y="0"/>
-                </a:lnTo>
-                <a:lnTo>
-                  <a:pt x="6637855" y="4990160"/>
-                </a:lnTo>
-                <a:lnTo>
-                  <a:pt x="0" y="4990160"/>
+                  <a:pt x="6549288" y="0"/>
+                </a:lnTo>
+                <a:lnTo>
+                  <a:pt x="6549288" y="5029317"/>
+                </a:lnTo>
+                <a:lnTo>
+                  <a:pt x="0" y="5029317"/>
                 </a:lnTo>
                 <a:lnTo>
                   <a:pt x="0" y="0"/>
@@ -6574,8 +9045,8 @@
         </p:nvSpPr>
         <p:spPr>
           <a:xfrm flipH="false" flipV="false" rot="0">
-            <a:off x="3105447" y="3644955"/>
-            <a:ext cx="5112167" cy="5091470"/>
+            <a:off x="2262285" y="3540994"/>
+            <a:ext cx="6435924" cy="4935056"/>
           </a:xfrm>
           <a:custGeom>
             <a:avLst/>
@@ -6584,18 +9055,18 @@
             <a:cxnLst/>
             <a:rect r="r" b="b" t="t" l="l"/>
             <a:pathLst>
-              <a:path h="5091470" w="5112167">
+              <a:path h="4935056" w="6435924">
                 <a:moveTo>
                   <a:pt x="0" y="0"/>
                 </a:moveTo>
                 <a:lnTo>
-                  <a:pt x="5112167" y="0"/>
-                </a:lnTo>
-                <a:lnTo>
-                  <a:pt x="5112167" y="5091470"/>
-                </a:lnTo>
-                <a:lnTo>
-                  <a:pt x="0" y="5091470"/>
+                  <a:pt x="6435924" y="0"/>
+                </a:lnTo>
+                <a:lnTo>
+                  <a:pt x="6435924" y="4935056"/>
+                </a:lnTo>
+                <a:lnTo>
+                  <a:pt x="0" y="4935056"/>
                 </a:lnTo>
                 <a:lnTo>
                   <a:pt x="0" y="0"/>
@@ -7010,8 +9481,8 @@
         </p:nvSpPr>
         <p:spPr>
           <a:xfrm flipH="false" flipV="false" rot="0">
-            <a:off x="1468724" y="2998147"/>
-            <a:ext cx="5980906" cy="4984089"/>
+            <a:off x="8217614" y="3644955"/>
+            <a:ext cx="6637854" cy="4990160"/>
           </a:xfrm>
           <a:custGeom>
             <a:avLst/>
@@ -7020,18 +9491,18 @@
             <a:cxnLst/>
             <a:rect r="r" b="b" t="t" l="l"/>
             <a:pathLst>
-              <a:path h="4984089" w="5980906">
+              <a:path h="4990160" w="6637854">
                 <a:moveTo>
                   <a:pt x="0" y="0"/>
                 </a:moveTo>
                 <a:lnTo>
-                  <a:pt x="5980906" y="0"/>
-                </a:lnTo>
-                <a:lnTo>
-                  <a:pt x="5980906" y="4984088"/>
-                </a:lnTo>
-                <a:lnTo>
-                  <a:pt x="0" y="4984088"/>
+                  <a:pt x="6637855" y="0"/>
+                </a:lnTo>
+                <a:lnTo>
+                  <a:pt x="6637855" y="4990160"/>
+                </a:lnTo>
+                <a:lnTo>
+                  <a:pt x="0" y="4990160"/>
                 </a:lnTo>
                 <a:lnTo>
                   <a:pt x="0" y="0"/>
@@ -7056,8 +9527,8 @@
         </p:nvSpPr>
         <p:spPr>
           <a:xfrm flipH="false" flipV="false" rot="0">
-            <a:off x="5913480" y="2822823"/>
-            <a:ext cx="10086324" cy="5334737"/>
+            <a:off x="3105447" y="3644955"/>
+            <a:ext cx="5112167" cy="5091470"/>
           </a:xfrm>
           <a:custGeom>
             <a:avLst/>
@@ -7066,18 +9537,18 @@
             <a:cxnLst/>
             <a:rect r="r" b="b" t="t" l="l"/>
             <a:pathLst>
-              <a:path h="5334737" w="10086324">
+              <a:path h="5091470" w="5112167">
                 <a:moveTo>
                   <a:pt x="0" y="0"/>
                 </a:moveTo>
                 <a:lnTo>
-                  <a:pt x="10086324" y="0"/>
-                </a:lnTo>
-                <a:lnTo>
-                  <a:pt x="10086324" y="5334736"/>
-                </a:lnTo>
-                <a:lnTo>
-                  <a:pt x="0" y="5334736"/>
+                  <a:pt x="5112167" y="0"/>
+                </a:lnTo>
+                <a:lnTo>
+                  <a:pt x="5112167" y="5091470"/>
+                </a:lnTo>
+                <a:lnTo>
+                  <a:pt x="0" y="5091470"/>
                 </a:lnTo>
                 <a:lnTo>
                   <a:pt x="0" y="0"/>
@@ -7179,9 +9650,9 @@
           <p:nvPr/>
         </p:nvSpPr>
         <p:spPr>
-          <a:xfrm flipH="false" flipV="false" rot="-2182206">
-            <a:off x="-29544" y="2376101"/>
-            <a:ext cx="3646515" cy="3547065"/>
+          <a:xfrm flipH="false" flipV="false" rot="1365716">
+            <a:off x="-12242" y="1558425"/>
+            <a:ext cx="3119438" cy="3102422"/>
           </a:xfrm>
           <a:custGeom>
             <a:avLst/>
@@ -7190,18 +9661,18 @@
             <a:cxnLst/>
             <a:rect r="r" b="b" t="t" l="l"/>
             <a:pathLst>
-              <a:path h="3547065" w="3646515">
+              <a:path h="3102422" w="3119438">
                 <a:moveTo>
                   <a:pt x="0" y="0"/>
                 </a:moveTo>
                 <a:lnTo>
-                  <a:pt x="3646515" y="0"/>
-                </a:lnTo>
-                <a:lnTo>
-                  <a:pt x="3646515" y="3547065"/>
-                </a:lnTo>
-                <a:lnTo>
-                  <a:pt x="0" y="3547065"/>
+                  <a:pt x="3119437" y="0"/>
+                </a:lnTo>
+                <a:lnTo>
+                  <a:pt x="3119437" y="3102423"/>
+                </a:lnTo>
+                <a:lnTo>
+                  <a:pt x="0" y="3102423"/>
                 </a:lnTo>
                 <a:lnTo>
                   <a:pt x="0" y="0"/>
@@ -7231,9 +9702,9 @@
           <p:nvPr/>
         </p:nvSpPr>
         <p:spPr>
-          <a:xfrm flipH="false" flipV="false" rot="1999307">
-            <a:off x="13617114" y="-667259"/>
-            <a:ext cx="3723411" cy="3842169"/>
+          <a:xfrm flipH="false" flipV="false" rot="-1409927">
+            <a:off x="15498369" y="5282412"/>
+            <a:ext cx="3017828" cy="3039937"/>
           </a:xfrm>
           <a:custGeom>
             <a:avLst/>
@@ -7242,18 +9713,18 @@
             <a:cxnLst/>
             <a:rect r="r" b="b" t="t" l="l"/>
             <a:pathLst>
-              <a:path h="3842169" w="3723411">
+              <a:path h="3039937" w="3017828">
                 <a:moveTo>
                   <a:pt x="0" y="0"/>
                 </a:moveTo>
                 <a:lnTo>
-                  <a:pt x="3723411" y="0"/>
-                </a:lnTo>
-                <a:lnTo>
-                  <a:pt x="3723411" y="3842169"/>
-                </a:lnTo>
-                <a:lnTo>
-                  <a:pt x="0" y="3842169"/>
+                  <a:pt x="3017829" y="0"/>
+                </a:lnTo>
+                <a:lnTo>
+                  <a:pt x="3017829" y="3039937"/>
+                </a:lnTo>
+                <a:lnTo>
+                  <a:pt x="0" y="3039937"/>
                 </a:lnTo>
                 <a:lnTo>
                   <a:pt x="0" y="0"/>
@@ -7283,9 +9754,9 @@
           <p:nvPr/>
         </p:nvSpPr>
         <p:spPr>
-          <a:xfrm flipH="false" flipV="false" rot="-1261922">
-            <a:off x="14832834" y="3616651"/>
-            <a:ext cx="3134767" cy="3676166"/>
+          <a:xfrm flipH="false" flipV="false" rot="0">
+            <a:off x="15247497" y="1720250"/>
+            <a:ext cx="1504614" cy="248945"/>
           </a:xfrm>
           <a:custGeom>
             <a:avLst/>
@@ -7294,18 +9765,18 @@
             <a:cxnLst/>
             <a:rect r="r" b="b" t="t" l="l"/>
             <a:pathLst>
-              <a:path h="3676166" w="3134767">
+              <a:path h="248945" w="1504614">
                 <a:moveTo>
                   <a:pt x="0" y="0"/>
                 </a:moveTo>
                 <a:lnTo>
-                  <a:pt x="3134767" y="0"/>
-                </a:lnTo>
-                <a:lnTo>
-                  <a:pt x="3134767" y="3676165"/>
-                </a:lnTo>
-                <a:lnTo>
-                  <a:pt x="0" y="3676165"/>
+                  <a:pt x="1504614" y="0"/>
+                </a:lnTo>
+                <a:lnTo>
+                  <a:pt x="1504614" y="248946"/>
+                </a:lnTo>
+                <a:lnTo>
+                  <a:pt x="0" y="248946"/>
                 </a:lnTo>
                 <a:lnTo>
                   <a:pt x="0" y="0"/>
@@ -7335,9 +9806,9 @@
           <p:nvPr/>
         </p:nvSpPr>
         <p:spPr>
-          <a:xfrm flipH="false" flipV="false" rot="695800">
-            <a:off x="1290351" y="7186679"/>
-            <a:ext cx="4770192" cy="3087615"/>
+          <a:xfrm flipH="false" flipV="false" rot="0">
+            <a:off x="1285233" y="8548999"/>
+            <a:ext cx="1504614" cy="248945"/>
           </a:xfrm>
           <a:custGeom>
             <a:avLst/>
@@ -7346,18 +9817,70 @@
             <a:cxnLst/>
             <a:rect r="r" b="b" t="t" l="l"/>
             <a:pathLst>
-              <a:path h="3087615" w="4770192">
+              <a:path h="248945" w="1504614">
                 <a:moveTo>
                   <a:pt x="0" y="0"/>
                 </a:moveTo>
                 <a:lnTo>
-                  <a:pt x="4770191" y="0"/>
-                </a:lnTo>
-                <a:lnTo>
-                  <a:pt x="4770191" y="3087615"/>
-                </a:lnTo>
-                <a:lnTo>
-                  <a:pt x="0" y="3087615"/>
+                  <a:pt x="1504614" y="0"/>
+                </a:lnTo>
+                <a:lnTo>
+                  <a:pt x="1504614" y="248945"/>
+                </a:lnTo>
+                <a:lnTo>
+                  <a:pt x="0" y="248945"/>
+                </a:lnTo>
+                <a:lnTo>
+                  <a:pt x="0" y="0"/>
+                </a:lnTo>
+                <a:close/>
+              </a:path>
+            </a:pathLst>
+          </a:custGeom>
+          <a:blipFill>
+            <a:blip r:embed="rId8">
+              <a:extLst>
+                <a:ext uri="{96DAC541-7B7A-43D3-8B79-37D633B846F1}">
+                  <asvg:svgBlip xmlns:asvg="http://schemas.microsoft.com/office/drawing/2016/SVG/main" r:embed="rId9"/>
+                </a:ext>
+              </a:extLst>
+            </a:blip>
+            <a:stretch>
+              <a:fillRect l="0" t="0" r="0" b="0"/>
+            </a:stretch>
+          </a:blipFill>
+        </p:spPr>
+      </p:sp>
+      <p:sp>
+        <p:nvSpPr>
+          <p:cNvPr name="Freeform 7" id="7"/>
+          <p:cNvSpPr/>
+          <p:nvPr/>
+        </p:nvSpPr>
+        <p:spPr>
+          <a:xfrm flipH="false" flipV="false" rot="0">
+            <a:off x="14931897" y="3540994"/>
+            <a:ext cx="631200" cy="611690"/>
+          </a:xfrm>
+          <a:custGeom>
+            <a:avLst/>
+            <a:gdLst/>
+            <a:ahLst/>
+            <a:cxnLst/>
+            <a:rect r="r" b="b" t="t" l="l"/>
+            <a:pathLst>
+              <a:path h="611690" w="631200">
+                <a:moveTo>
+                  <a:pt x="0" y="0"/>
+                </a:moveTo>
+                <a:lnTo>
+                  <a:pt x="631199" y="0"/>
+                </a:lnTo>
+                <a:lnTo>
+                  <a:pt x="631199" y="611690"/>
+                </a:lnTo>
+                <a:lnTo>
+                  <a:pt x="0" y="611690"/>
                 </a:lnTo>
                 <a:lnTo>
                   <a:pt x="0" y="0"/>
@@ -7382,265 +9905,13 @@
       </p:sp>
       <p:sp>
         <p:nvSpPr>
-          <p:cNvPr name="Freeform 7" id="7"/>
-          <p:cNvSpPr/>
-          <p:nvPr/>
-        </p:nvSpPr>
-        <p:spPr>
-          <a:xfrm flipH="false" flipV="false" rot="0">
-            <a:off x="2264510" y="293587"/>
-            <a:ext cx="2821872" cy="2693605"/>
-          </a:xfrm>
-          <a:custGeom>
-            <a:avLst/>
-            <a:gdLst/>
-            <a:ahLst/>
-            <a:cxnLst/>
-            <a:rect r="r" b="b" t="t" l="l"/>
-            <a:pathLst>
-              <a:path h="2693605" w="2821872">
-                <a:moveTo>
-                  <a:pt x="0" y="0"/>
-                </a:moveTo>
-                <a:lnTo>
-                  <a:pt x="2821872" y="0"/>
-                </a:lnTo>
-                <a:lnTo>
-                  <a:pt x="2821872" y="2693605"/>
-                </a:lnTo>
-                <a:lnTo>
-                  <a:pt x="0" y="2693605"/>
-                </a:lnTo>
-                <a:lnTo>
-                  <a:pt x="0" y="0"/>
-                </a:lnTo>
-                <a:close/>
-              </a:path>
-            </a:pathLst>
-          </a:custGeom>
-          <a:blipFill>
-            <a:blip r:embed="rId12">
-              <a:extLst>
-                <a:ext uri="{96DAC541-7B7A-43D3-8B79-37D633B846F1}">
-                  <asvg:svgBlip xmlns:asvg="http://schemas.microsoft.com/office/drawing/2016/SVG/main" r:embed="rId13"/>
-                </a:ext>
-              </a:extLst>
-            </a:blip>
-            <a:stretch>
-              <a:fillRect l="0" t="0" r="0" b="0"/>
-            </a:stretch>
-          </a:blipFill>
-        </p:spPr>
-      </p:sp>
-      <p:sp>
-        <p:nvSpPr>
           <p:cNvPr name="Freeform 8" id="8"/>
           <p:cNvSpPr/>
           <p:nvPr/>
         </p:nvSpPr>
         <p:spPr>
-          <a:xfrm flipH="false" flipV="false" rot="-573857">
-            <a:off x="12935469" y="7783583"/>
-            <a:ext cx="3268273" cy="2638388"/>
-          </a:xfrm>
-          <a:custGeom>
-            <a:avLst/>
-            <a:gdLst/>
-            <a:ahLst/>
-            <a:cxnLst/>
-            <a:rect r="r" b="b" t="t" l="l"/>
-            <a:pathLst>
-              <a:path h="2638388" w="3268273">
-                <a:moveTo>
-                  <a:pt x="0" y="0"/>
-                </a:moveTo>
-                <a:lnTo>
-                  <a:pt x="3268273" y="0"/>
-                </a:lnTo>
-                <a:lnTo>
-                  <a:pt x="3268273" y="2638388"/>
-                </a:lnTo>
-                <a:lnTo>
-                  <a:pt x="0" y="2638388"/>
-                </a:lnTo>
-                <a:lnTo>
-                  <a:pt x="0" y="0"/>
-                </a:lnTo>
-                <a:close/>
-              </a:path>
-            </a:pathLst>
-          </a:custGeom>
-          <a:blipFill>
-            <a:blip r:embed="rId14">
-              <a:extLst>
-                <a:ext uri="{96DAC541-7B7A-43D3-8B79-37D633B846F1}">
-                  <asvg:svgBlip xmlns:asvg="http://schemas.microsoft.com/office/drawing/2016/SVG/main" r:embed="rId15"/>
-                </a:ext>
-              </a:extLst>
-            </a:blip>
-            <a:stretch>
-              <a:fillRect l="0" t="0" r="0" b="0"/>
-            </a:stretch>
-          </a:blipFill>
-        </p:spPr>
-      </p:sp>
-      <p:sp>
-        <p:nvSpPr>
-          <p:cNvPr name="TextBox 9" id="9"/>
-          <p:cNvSpPr txBox="true"/>
-          <p:nvPr/>
-        </p:nvSpPr>
-        <p:spPr>
-          <a:xfrm rot="0">
-            <a:off x="4144766" y="3671357"/>
-            <a:ext cx="10267167" cy="1750438"/>
-          </a:xfrm>
-          <a:prstGeom prst="rect">
-            <a:avLst/>
-          </a:prstGeom>
-        </p:spPr>
-        <p:txBody>
-          <a:bodyPr anchor="t" rtlCol="false" tIns="0" lIns="0" bIns="0" rIns="0">
-            <a:spAutoFit/>
-          </a:bodyPr>
-          <a:lstStyle/>
-          <a:p>
-            <a:pPr algn="ctr">
-              <a:lnSpc>
-                <a:spcPts val="13744"/>
-              </a:lnSpc>
-              <a:spcBef>
-                <a:spcPct val="0"/>
-              </a:spcBef>
-            </a:pPr>
-            <a:r>
-              <a:rPr lang="en-US" sz="11454">
-                <a:solidFill>
-                  <a:srgbClr val="1C3D86"/>
-                </a:solidFill>
-                <a:latin typeface="Lilita One"/>
-                <a:ea typeface="Lilita One"/>
-                <a:cs typeface="Lilita One"/>
-                <a:sym typeface="Lilita One"/>
-              </a:rPr>
-              <a:t>DEMO</a:t>
-            </a:r>
-          </a:p>
-        </p:txBody>
-      </p:sp>
-      <p:sp>
-        <p:nvSpPr>
-          <p:cNvPr name="Freeform 10" id="10"/>
-          <p:cNvSpPr/>
-          <p:nvPr/>
-        </p:nvSpPr>
-        <p:spPr>
           <a:xfrm flipH="false" flipV="false" rot="0">
-            <a:off x="10730121" y="1253826"/>
-            <a:ext cx="1504614" cy="248945"/>
-          </a:xfrm>
-          <a:custGeom>
-            <a:avLst/>
-            <a:gdLst/>
-            <a:ahLst/>
-            <a:cxnLst/>
-            <a:rect r="r" b="b" t="t" l="l"/>
-            <a:pathLst>
-              <a:path h="248945" w="1504614">
-                <a:moveTo>
-                  <a:pt x="0" y="0"/>
-                </a:moveTo>
-                <a:lnTo>
-                  <a:pt x="1504614" y="0"/>
-                </a:lnTo>
-                <a:lnTo>
-                  <a:pt x="1504614" y="248945"/>
-                </a:lnTo>
-                <a:lnTo>
-                  <a:pt x="0" y="248945"/>
-                </a:lnTo>
-                <a:lnTo>
-                  <a:pt x="0" y="0"/>
-                </a:lnTo>
-                <a:close/>
-              </a:path>
-            </a:pathLst>
-          </a:custGeom>
-          <a:blipFill>
-            <a:blip r:embed="rId16">
-              <a:extLst>
-                <a:ext uri="{96DAC541-7B7A-43D3-8B79-37D633B846F1}">
-                  <asvg:svgBlip xmlns:asvg="http://schemas.microsoft.com/office/drawing/2016/SVG/main" r:embed="rId17"/>
-                </a:ext>
-              </a:extLst>
-            </a:blip>
-            <a:stretch>
-              <a:fillRect l="0" t="0" r="0" b="0"/>
-            </a:stretch>
-          </a:blipFill>
-        </p:spPr>
-      </p:sp>
-      <p:sp>
-        <p:nvSpPr>
-          <p:cNvPr name="Freeform 11" id="11"/>
-          <p:cNvSpPr/>
-          <p:nvPr/>
-        </p:nvSpPr>
-        <p:spPr>
-          <a:xfrm flipH="false" flipV="false" rot="0">
-            <a:off x="6798748" y="8903621"/>
-            <a:ext cx="1504614" cy="248945"/>
-          </a:xfrm>
-          <a:custGeom>
-            <a:avLst/>
-            <a:gdLst/>
-            <a:ahLst/>
-            <a:cxnLst/>
-            <a:rect r="r" b="b" t="t" l="l"/>
-            <a:pathLst>
-              <a:path h="248945" w="1504614">
-                <a:moveTo>
-                  <a:pt x="0" y="0"/>
-                </a:moveTo>
-                <a:lnTo>
-                  <a:pt x="1504615" y="0"/>
-                </a:lnTo>
-                <a:lnTo>
-                  <a:pt x="1504615" y="248945"/>
-                </a:lnTo>
-                <a:lnTo>
-                  <a:pt x="0" y="248945"/>
-                </a:lnTo>
-                <a:lnTo>
-                  <a:pt x="0" y="0"/>
-                </a:lnTo>
-                <a:close/>
-              </a:path>
-            </a:pathLst>
-          </a:custGeom>
-          <a:blipFill>
-            <a:blip r:embed="rId16">
-              <a:extLst>
-                <a:ext uri="{96DAC541-7B7A-43D3-8B79-37D633B846F1}">
-                  <asvg:svgBlip xmlns:asvg="http://schemas.microsoft.com/office/drawing/2016/SVG/main" r:embed="rId17"/>
-                </a:ext>
-              </a:extLst>
-            </a:blip>
-            <a:stretch>
-              <a:fillRect l="0" t="0" r="0" b="0"/>
-            </a:stretch>
-          </a:blipFill>
-        </p:spPr>
-      </p:sp>
-      <p:sp>
-        <p:nvSpPr>
-          <p:cNvPr name="Freeform 12" id="12"/>
-          <p:cNvSpPr/>
-          <p:nvPr/>
-        </p:nvSpPr>
-        <p:spPr>
-          <a:xfrm flipH="false" flipV="false" rot="0">
-            <a:off x="6167549" y="1108561"/>
+            <a:off x="2474248" y="6190690"/>
             <a:ext cx="631200" cy="611690"/>
           </a:xfrm>
           <a:custGeom>
@@ -7658,10 +9929,10 @@
                   <a:pt x="631199" y="0"/>
                 </a:lnTo>
                 <a:lnTo>
-                  <a:pt x="631199" y="611689"/>
-                </a:lnTo>
-                <a:lnTo>
-                  <a:pt x="0" y="611689"/>
+                  <a:pt x="631199" y="611690"/>
+                </a:lnTo>
+                <a:lnTo>
+                  <a:pt x="0" y="611690"/>
                 </a:lnTo>
                 <a:lnTo>
                   <a:pt x="0" y="0"/>
@@ -7671,10 +9942,10 @@
             </a:pathLst>
           </a:custGeom>
           <a:blipFill>
-            <a:blip r:embed="rId18">
+            <a:blip r:embed="rId10">
               <a:extLst>
                 <a:ext uri="{96DAC541-7B7A-43D3-8B79-37D633B846F1}">
-                  <asvg:svgBlip xmlns:asvg="http://schemas.microsoft.com/office/drawing/2016/SVG/main" r:embed="rId19"/>
+                  <asvg:svgBlip xmlns:asvg="http://schemas.microsoft.com/office/drawing/2016/SVG/main" r:embed="rId11"/>
                 </a:ext>
               </a:extLst>
             </a:blip>
@@ -7686,14 +9957,14 @@
       </p:sp>
       <p:sp>
         <p:nvSpPr>
-          <p:cNvPr name="Freeform 13" id="13"/>
+          <p:cNvPr name="Freeform 9" id="9"/>
           <p:cNvSpPr/>
           <p:nvPr/>
         </p:nvSpPr>
         <p:spPr>
           <a:xfrm flipH="false" flipV="false" rot="0">
-            <a:off x="10967099" y="8581312"/>
-            <a:ext cx="631200" cy="611690"/>
+            <a:off x="1468724" y="2998147"/>
+            <a:ext cx="5980906" cy="4984089"/>
           </a:xfrm>
           <a:custGeom>
             <a:avLst/>
@@ -7702,18 +9973,18 @@
             <a:cxnLst/>
             <a:rect r="r" b="b" t="t" l="l"/>
             <a:pathLst>
-              <a:path h="611690" w="631200">
+              <a:path h="4984089" w="5980906">
                 <a:moveTo>
                   <a:pt x="0" y="0"/>
                 </a:moveTo>
                 <a:lnTo>
-                  <a:pt x="631200" y="0"/>
-                </a:lnTo>
-                <a:lnTo>
-                  <a:pt x="631200" y="611690"/>
-                </a:lnTo>
-                <a:lnTo>
-                  <a:pt x="0" y="611690"/>
+                  <a:pt x="5980906" y="0"/>
+                </a:lnTo>
+                <a:lnTo>
+                  <a:pt x="5980906" y="4984088"/>
+                </a:lnTo>
+                <a:lnTo>
+                  <a:pt x="0" y="4984088"/>
                 </a:lnTo>
                 <a:lnTo>
                   <a:pt x="0" y="0"/>
@@ -7723,13 +9994,53 @@
             </a:pathLst>
           </a:custGeom>
           <a:blipFill>
-            <a:blip r:embed="rId18">
-              <a:extLst>
-                <a:ext uri="{96DAC541-7B7A-43D3-8B79-37D633B846F1}">
-                  <asvg:svgBlip xmlns:asvg="http://schemas.microsoft.com/office/drawing/2016/SVG/main" r:embed="rId19"/>
-                </a:ext>
-              </a:extLst>
-            </a:blip>
+            <a:blip r:embed="rId12"/>
+            <a:stretch>
+              <a:fillRect l="0" t="0" r="0" b="0"/>
+            </a:stretch>
+          </a:blipFill>
+        </p:spPr>
+      </p:sp>
+      <p:sp>
+        <p:nvSpPr>
+          <p:cNvPr name="Freeform 10" id="10"/>
+          <p:cNvSpPr/>
+          <p:nvPr/>
+        </p:nvSpPr>
+        <p:spPr>
+          <a:xfrm flipH="false" flipV="false" rot="0">
+            <a:off x="5913480" y="2822823"/>
+            <a:ext cx="10086324" cy="5334737"/>
+          </a:xfrm>
+          <a:custGeom>
+            <a:avLst/>
+            <a:gdLst/>
+            <a:ahLst/>
+            <a:cxnLst/>
+            <a:rect r="r" b="b" t="t" l="l"/>
+            <a:pathLst>
+              <a:path h="5334737" w="10086324">
+                <a:moveTo>
+                  <a:pt x="0" y="0"/>
+                </a:moveTo>
+                <a:lnTo>
+                  <a:pt x="10086324" y="0"/>
+                </a:lnTo>
+                <a:lnTo>
+                  <a:pt x="10086324" y="5334736"/>
+                </a:lnTo>
+                <a:lnTo>
+                  <a:pt x="0" y="5334736"/>
+                </a:lnTo>
+                <a:lnTo>
+                  <a:pt x="0" y="0"/>
+                </a:lnTo>
+                <a:close/>
+              </a:path>
+            </a:pathLst>
+          </a:custGeom>
+          <a:blipFill>
+            <a:blip r:embed="rId13"/>
             <a:stretch>
               <a:fillRect l="0" t="0" r="0" b="0"/>
             </a:stretch>
@@ -8135,7 +10446,7 @@
         <p:spPr>
           <a:xfrm rot="0">
             <a:off x="4144766" y="3671357"/>
-            <a:ext cx="10267167" cy="5232264"/>
+            <a:ext cx="10267167" cy="1750438"/>
           </a:xfrm>
           <a:prstGeom prst="rect">
             <a:avLst/>
@@ -8151,6 +10462,9 @@
               <a:lnSpc>
                 <a:spcPts val="13744"/>
               </a:lnSpc>
+              <a:spcBef>
+                <a:spcPct val="0"/>
+              </a:spcBef>
             </a:pPr>
             <a:r>
               <a:rPr lang="en-US" sz="11454">
@@ -8162,18 +10476,8 @@
                 <a:cs typeface="Lilita One"/>
                 <a:sym typeface="Lilita One"/>
               </a:rPr>
-              <a:t>THANK FOR LISTENING</a:t>
+              <a:t>DEMO</a:t>
             </a:r>
-          </a:p>
-          <a:p>
-            <a:pPr algn="ctr">
-              <a:lnSpc>
-                <a:spcPts val="13744"/>
-              </a:lnSpc>
-              <a:spcBef>
-                <a:spcPct val="0"/>
-              </a:spcBef>
-            </a:pPr>
           </a:p>
         </p:txBody>
       </p:sp>
